--- a/docs/Apteros_presentation_v2.pptx
+++ b/docs/Apteros_presentation_v2.pptx
@@ -74,29 +74,21 @@
             <a:noAutofit/>
           </a:bodyPr>
           <a:p>
-            <a:r>
-              <a:rPr b="0" lang="en-US" sz="1800" spc="-1" strike="noStrike">
-                <a:solidFill>
-                  <a:schemeClr val="dk1"/>
-                </a:solidFill>
-                <a:latin typeface="Calibri"/>
-              </a:rPr>
-              <a:t>Click to move the </a:t>
-            </a:r>
-            <a:r>
-              <a:rPr b="0" lang="en-US" sz="1800" spc="-1" strike="noStrike">
-                <a:solidFill>
-                  <a:schemeClr val="dk1"/>
-                </a:solidFill>
-                <a:latin typeface="Calibri"/>
-              </a:rPr>
-              <a:t>slide</a:t>
-            </a:r>
-            <a:endParaRPr b="0" lang="en-US" sz="1800" spc="-1" strike="noStrike">
-              <a:solidFill>
-                <a:schemeClr val="dk1"/>
-              </a:solidFill>
-              <a:latin typeface="Calibri"/>
+            <a:pPr algn="ctr"/>
+            <a:r>
+              <a:rPr b="0" lang="en-US" sz="4400" spc="-1" strike="noStrike">
+                <a:solidFill>
+                  <a:srgbClr val="000000"/>
+                </a:solidFill>
+                <a:latin typeface="Arial"/>
+              </a:rPr>
+              <a:t>Click to move the slide</a:t>
+            </a:r>
+            <a:endParaRPr b="0" lang="en-US" sz="4400" spc="-1" strike="noStrike">
+              <a:solidFill>
+                <a:srgbClr val="000000"/>
+              </a:solidFill>
+              <a:latin typeface="Arial"/>
             </a:endParaRPr>
           </a:p>
         </p:txBody>
@@ -139,16 +131,7 @@
                 </a:solidFill>
                 <a:latin typeface="Arial"/>
               </a:rPr>
-              <a:t>Click to edit the </a:t>
-            </a:r>
-            <a:r>
-              <a:rPr b="0" lang="en-US" sz="2000" spc="-1" strike="noStrike">
-                <a:solidFill>
-                  <a:srgbClr val="000000"/>
-                </a:solidFill>
-                <a:latin typeface="Arial"/>
-              </a:rPr>
-              <a:t>notes format</a:t>
+              <a:t>Click to edit the notes format</a:t>
             </a:r>
             <a:endParaRPr b="0" lang="en-US" sz="2000" spc="-1" strike="noStrike">
               <a:solidFill>
@@ -370,7 +353,7 @@
             <a:pPr indent="0" algn="r">
               <a:buNone/>
             </a:pPr>
-            <a:fld id="{957AFA1F-9EB0-4436-B5D9-A5D6AD0F594E}" type="slidenum">
+            <a:fld id="{C4388014-CDD0-4E72-8356-7A4AF6595320}" type="slidenum">
               <a:rPr b="0" lang="en-US" sz="1400" spc="-1" strike="noStrike">
                 <a:solidFill>
                   <a:srgbClr val="000000"/>
@@ -424,7 +407,7 @@
         <p:spPr>
           <a:xfrm>
             <a:off x="-360" y="-360"/>
-            <a:ext cx="720" cy="720"/>
+            <a:ext cx="360" cy="360"/>
           </a:xfrm>
           <a:prstGeom prst="rect">
             <a:avLst/>
@@ -502,11 +485,14 @@
             <a:noAutofit/>
           </a:bodyPr>
           <a:lstStyle>
-            <a:lvl1pPr indent="0" defTabSz="914400">
+            <a:lvl1pPr indent="0" algn="r" defTabSz="914400">
               <a:lnSpc>
                 <a:spcPct val="100000"/>
               </a:lnSpc>
               <a:buNone/>
+              <a:tabLst>
+                <a:tab algn="l" pos="0"/>
+              </a:tabLst>
               <a:defRPr b="0" lang="en-US" sz="1800" spc="-1" strike="noStrike">
                 <a:solidFill>
                   <a:schemeClr val="dk1"/>
@@ -517,13 +503,16 @@
             </a:lvl1pPr>
           </a:lstStyle>
           <a:p>
-            <a:pPr indent="0" defTabSz="914400">
+            <a:pPr indent="0" algn="r" defTabSz="914400">
               <a:lnSpc>
                 <a:spcPct val="100000"/>
               </a:lnSpc>
               <a:buNone/>
-            </a:pPr>
-            <a:fld id="{A40C9E6B-E8FA-4360-81D0-424BE933E513}" type="slidenum">
+              <a:tabLst>
+                <a:tab algn="l" pos="0"/>
+              </a:tabLst>
+            </a:pPr>
+            <a:fld id="{7147E4BB-464F-4377-8D97-E126EC904303}" type="slidenum">
               <a:rPr b="0" lang="en-US" sz="1800" spc="-1" strike="noStrike">
                 <a:solidFill>
                   <a:schemeClr val="dk1"/>
@@ -658,7 +647,7 @@
             <a:pPr indent="0">
               <a:buNone/>
             </a:pPr>
-            <a:endParaRPr b="0" lang="en-US" sz="1800" spc="-1" strike="noStrike">
+            <a:endParaRPr b="0" lang="en-US" sz="1400" spc="-1" strike="noStrike">
               <a:solidFill>
                 <a:srgbClr val="000000"/>
               </a:solidFill>
@@ -783,7 +772,7 @@
             <a:pPr indent="0">
               <a:buNone/>
             </a:pPr>
-            <a:endParaRPr b="0" lang="en-US" sz="1800" spc="-1" strike="noStrike">
+            <a:endParaRPr b="0" lang="en-US" sz="1400" spc="-1" strike="noStrike">
               <a:solidFill>
                 <a:srgbClr val="000000"/>
               </a:solidFill>
@@ -908,7 +897,7 @@
             <a:pPr indent="0">
               <a:buNone/>
             </a:pPr>
-            <a:endParaRPr b="0" lang="en-US" sz="1800" spc="-1" strike="noStrike">
+            <a:endParaRPr b="0" lang="en-US" sz="1400" spc="-1" strike="noStrike">
               <a:solidFill>
                 <a:srgbClr val="000000"/>
               </a:solidFill>
@@ -1033,7 +1022,7 @@
             <a:pPr indent="0">
               <a:buNone/>
             </a:pPr>
-            <a:endParaRPr b="0" lang="en-US" sz="1800" spc="-1" strike="noStrike">
+            <a:endParaRPr b="0" lang="en-US" sz="1400" spc="-1" strike="noStrike">
               <a:solidFill>
                 <a:srgbClr val="000000"/>
               </a:solidFill>
@@ -1158,7 +1147,7 @@
             <a:pPr indent="0">
               <a:buNone/>
             </a:pPr>
-            <a:endParaRPr b="0" lang="en-US" sz="1800" spc="-1" strike="noStrike">
+            <a:endParaRPr b="0" lang="en-US" sz="1400" spc="-1" strike="noStrike">
               <a:solidFill>
                 <a:srgbClr val="000000"/>
               </a:solidFill>
@@ -1283,7 +1272,7 @@
             <a:pPr indent="0">
               <a:buNone/>
             </a:pPr>
-            <a:endParaRPr b="0" lang="en-US" sz="1800" spc="-1" strike="noStrike">
+            <a:endParaRPr b="0" lang="en-US" sz="1400" spc="-1" strike="noStrike">
               <a:solidFill>
                 <a:srgbClr val="000000"/>
               </a:solidFill>
@@ -1370,6 +1359,9 @@
                 <a:spcPct val="100000"/>
               </a:lnSpc>
               <a:buNone/>
+              <a:tabLst>
+                <a:tab algn="l" pos="0"/>
+              </a:tabLst>
             </a:pPr>
             <a:r>
               <a:rPr b="0" lang="en-US" sz="2000" spc="-1" strike="noStrike">
@@ -1393,6 +1385,9 @@
                 <a:spcPct val="100000"/>
               </a:lnSpc>
               <a:buNone/>
+              <a:tabLst>
+                <a:tab algn="l" pos="0"/>
+              </a:tabLst>
             </a:pPr>
             <a:r>
               <a:rPr b="0" lang="en-US" sz="2000" spc="-1" strike="noStrike">
@@ -1443,7 +1438,7 @@
             <a:pPr indent="0">
               <a:buNone/>
             </a:pPr>
-            <a:endParaRPr b="0" lang="en-US" sz="1800" spc="-1" strike="noStrike">
+            <a:endParaRPr b="0" lang="en-US" sz="1400" spc="-1" strike="noStrike">
               <a:solidFill>
                 <a:srgbClr val="000000"/>
               </a:solidFill>
@@ -1568,7 +1563,7 @@
             <a:pPr indent="0">
               <a:buNone/>
             </a:pPr>
-            <a:endParaRPr b="0" lang="en-US" sz="1800" spc="-1" strike="noStrike">
+            <a:endParaRPr b="0" lang="en-US" sz="1400" spc="-1" strike="noStrike">
               <a:solidFill>
                 <a:srgbClr val="000000"/>
               </a:solidFill>
@@ -1693,7 +1688,7 @@
             <a:pPr indent="0">
               <a:buNone/>
             </a:pPr>
-            <a:endParaRPr b="0" lang="en-US" sz="1800" spc="-1" strike="noStrike">
+            <a:endParaRPr b="0" lang="en-US" sz="1400" spc="-1" strike="noStrike">
               <a:solidFill>
                 <a:srgbClr val="000000"/>
               </a:solidFill>
@@ -1780,6 +1775,9 @@
                 <a:spcPct val="100000"/>
               </a:lnSpc>
               <a:buNone/>
+              <a:tabLst>
+                <a:tab algn="l" pos="0"/>
+              </a:tabLst>
             </a:pPr>
             <a:r>
               <a:rPr b="0" lang="en-US" sz="2000" spc="-1" strike="noStrike">
@@ -1803,6 +1801,9 @@
                 <a:spcPct val="100000"/>
               </a:lnSpc>
               <a:buNone/>
+              <a:tabLst>
+                <a:tab algn="l" pos="0"/>
+              </a:tabLst>
             </a:pPr>
             <a:r>
               <a:rPr b="0" lang="en-US" sz="2000" spc="-1" strike="noStrike">
@@ -1853,7 +1854,7 @@
             <a:pPr indent="0">
               <a:buNone/>
             </a:pPr>
-            <a:endParaRPr b="0" lang="en-US" sz="1800" spc="-1" strike="noStrike">
+            <a:endParaRPr b="0" lang="en-US" sz="1400" spc="-1" strike="noStrike">
               <a:solidFill>
                 <a:srgbClr val="000000"/>
               </a:solidFill>
@@ -1940,6 +1941,9 @@
                 <a:spcPct val="100000"/>
               </a:lnSpc>
               <a:buNone/>
+              <a:tabLst>
+                <a:tab algn="l" pos="0"/>
+              </a:tabLst>
             </a:pPr>
             <a:r>
               <a:rPr b="0" lang="en-US" sz="2000" spc="-1" strike="noStrike">
@@ -1963,6 +1967,9 @@
                 <a:spcPct val="100000"/>
               </a:lnSpc>
               <a:buNone/>
+              <a:tabLst>
+                <a:tab algn="l" pos="0"/>
+              </a:tabLst>
             </a:pPr>
             <a:r>
               <a:rPr b="0" lang="en-US" sz="2000" spc="-1" strike="noStrike">
@@ -2013,7 +2020,7 @@
             <a:pPr indent="0">
               <a:buNone/>
             </a:pPr>
-            <a:endParaRPr b="0" lang="en-US" sz="1800" spc="-1" strike="noStrike">
+            <a:endParaRPr b="0" lang="en-US" sz="1400" spc="-1" strike="noStrike">
               <a:solidFill>
                 <a:srgbClr val="000000"/>
               </a:solidFill>
@@ -2100,6 +2107,9 @@
                 <a:spcPct val="100000"/>
               </a:lnSpc>
               <a:buNone/>
+              <a:tabLst>
+                <a:tab algn="l" pos="0"/>
+              </a:tabLst>
             </a:pPr>
             <a:r>
               <a:rPr b="0" lang="en-US" sz="2000" spc="-1" strike="noStrike">
@@ -2123,6 +2133,9 @@
                 <a:spcPct val="100000"/>
               </a:lnSpc>
               <a:buNone/>
+              <a:tabLst>
+                <a:tab algn="l" pos="0"/>
+              </a:tabLst>
             </a:pPr>
             <a:r>
               <a:rPr b="0" lang="en-US" sz="2000" spc="-1" strike="noStrike">
@@ -2146,6 +2159,9 @@
                 <a:spcPct val="100000"/>
               </a:lnSpc>
               <a:buNone/>
+              <a:tabLst>
+                <a:tab algn="l" pos="0"/>
+              </a:tabLst>
             </a:pPr>
             <a:r>
               <a:rPr b="0" lang="en-US" sz="2000" spc="-1" strike="noStrike">
@@ -2196,7 +2212,7 @@
             <a:pPr indent="0">
               <a:buNone/>
             </a:pPr>
-            <a:endParaRPr b="0" lang="en-US" sz="1800" spc="-1" strike="noStrike">
+            <a:endParaRPr b="0" lang="en-US" sz="1400" spc="-1" strike="noStrike">
               <a:solidFill>
                 <a:srgbClr val="000000"/>
               </a:solidFill>
@@ -2283,6 +2299,9 @@
                 <a:spcPct val="100000"/>
               </a:lnSpc>
               <a:buNone/>
+              <a:tabLst>
+                <a:tab algn="l" pos="0"/>
+              </a:tabLst>
             </a:pPr>
             <a:r>
               <a:rPr b="0" lang="en-US" sz="2000" spc="-1" strike="noStrike">
@@ -2306,6 +2325,9 @@
                 <a:spcPct val="100000"/>
               </a:lnSpc>
               <a:buNone/>
+              <a:tabLst>
+                <a:tab algn="l" pos="0"/>
+              </a:tabLst>
             </a:pPr>
             <a:r>
               <a:rPr b="0" lang="en-US" sz="2000" spc="-1" strike="noStrike">
@@ -2329,6 +2351,9 @@
                 <a:spcPct val="100000"/>
               </a:lnSpc>
               <a:buNone/>
+              <a:tabLst>
+                <a:tab algn="l" pos="0"/>
+              </a:tabLst>
             </a:pPr>
             <a:r>
               <a:rPr b="0" lang="en-US" sz="2000" spc="-1" strike="noStrike">
@@ -2379,7 +2404,7 @@
             <a:pPr indent="0">
               <a:buNone/>
             </a:pPr>
-            <a:endParaRPr b="0" lang="en-US" sz="1800" spc="-1" strike="noStrike">
+            <a:endParaRPr b="0" lang="en-US" sz="1400" spc="-1" strike="noStrike">
               <a:solidFill>
                 <a:srgbClr val="000000"/>
               </a:solidFill>
@@ -2504,7 +2529,7 @@
             <a:pPr indent="0">
               <a:buNone/>
             </a:pPr>
-            <a:endParaRPr b="0" lang="en-US" sz="1800" spc="-1" strike="noStrike">
+            <a:endParaRPr b="0" lang="en-US" sz="1400" spc="-1" strike="noStrike">
               <a:solidFill>
                 <a:srgbClr val="000000"/>
               </a:solidFill>
@@ -2592,32 +2617,23 @@
             <a:noAutofit/>
           </a:bodyPr>
           <a:p>
-            <a:pPr indent="0">
+            <a:pPr indent="0" algn="ctr">
               <a:buNone/>
             </a:pPr>
             <a:r>
-              <a:rPr b="0" lang="en-US" sz="1800" spc="-1" strike="noStrike">
-                <a:solidFill>
-                  <a:schemeClr val="dk1"/>
-                </a:solidFill>
-                <a:latin typeface="Calibri"/>
-              </a:rPr>
-              <a:t>Click to edit the </a:t>
-            </a:r>
-            <a:r>
-              <a:rPr b="0" lang="en-US" sz="1800" spc="-1" strike="noStrike">
-                <a:solidFill>
-                  <a:schemeClr val="dk1"/>
-                </a:solidFill>
-                <a:latin typeface="Calibri"/>
-              </a:rPr>
-              <a:t>title text format</a:t>
-            </a:r>
-            <a:endParaRPr b="0" lang="en-US" sz="1800" spc="-1" strike="noStrike">
-              <a:solidFill>
-                <a:schemeClr val="dk1"/>
-              </a:solidFill>
-              <a:latin typeface="Calibri"/>
+              <a:rPr b="0" lang="en-US" sz="4400" spc="-1" strike="noStrike">
+                <a:solidFill>
+                  <a:srgbClr val="000000"/>
+                </a:solidFill>
+                <a:latin typeface="Arial"/>
+              </a:rPr>
+              <a:t>Click to edit the title text format</a:t>
+            </a:r>
+            <a:endParaRPr b="0" lang="en-US" sz="4400" spc="-1" strike="noStrike">
+              <a:solidFill>
+                <a:srgbClr val="000000"/>
+              </a:solidFill>
+              <a:latin typeface="Arial"/>
             </a:endParaRPr>
           </a:p>
         </p:txBody>
@@ -2664,17 +2680,17 @@
             <a:r>
               <a:rPr b="0" lang="en-US" sz="3200" spc="-1" strike="noStrike">
                 <a:solidFill>
-                  <a:schemeClr val="dk1"/>
-                </a:solidFill>
-                <a:latin typeface="Calibri"/>
+                  <a:srgbClr val="000000"/>
+                </a:solidFill>
+                <a:latin typeface="Arial"/>
               </a:rPr>
               <a:t>Click to edit the outline text format</a:t>
             </a:r>
             <a:endParaRPr b="0" lang="en-US" sz="3200" spc="-1" strike="noStrike">
               <a:solidFill>
-                <a:schemeClr val="dk1"/>
-              </a:solidFill>
-              <a:latin typeface="Calibri"/>
+                <a:srgbClr val="000000"/>
+              </a:solidFill>
+              <a:latin typeface="Arial"/>
             </a:endParaRPr>
           </a:p>
           <a:p>
@@ -2690,19 +2706,19 @@
               <a:buChar char=""/>
             </a:pPr>
             <a:r>
-              <a:rPr b="0" lang="en-US" sz="2400" spc="-1" strike="noStrike">
-                <a:solidFill>
-                  <a:schemeClr val="dk1"/>
-                </a:solidFill>
-                <a:latin typeface="Calibri"/>
+              <a:rPr b="0" lang="en-US" sz="2800" spc="-1" strike="noStrike">
+                <a:solidFill>
+                  <a:srgbClr val="000000"/>
+                </a:solidFill>
+                <a:latin typeface="Arial"/>
               </a:rPr>
               <a:t>Second Outline Level</a:t>
             </a:r>
-            <a:endParaRPr b="0" lang="en-US" sz="2400" spc="-1" strike="noStrike">
-              <a:solidFill>
-                <a:schemeClr val="dk1"/>
-              </a:solidFill>
-              <a:latin typeface="Calibri"/>
+            <a:endParaRPr b="0" lang="en-US" sz="2800" spc="-1" strike="noStrike">
+              <a:solidFill>
+                <a:srgbClr val="000000"/>
+              </a:solidFill>
+              <a:latin typeface="Arial"/>
             </a:endParaRPr>
           </a:p>
           <a:p>
@@ -2718,19 +2734,19 @@
               <a:buChar char=""/>
             </a:pPr>
             <a:r>
-              <a:rPr b="0" lang="en-US" sz="2000" spc="-1" strike="noStrike">
-                <a:solidFill>
-                  <a:schemeClr val="dk1"/>
-                </a:solidFill>
-                <a:latin typeface="Calibri"/>
+              <a:rPr b="0" lang="en-US" sz="2400" spc="-1" strike="noStrike">
+                <a:solidFill>
+                  <a:srgbClr val="000000"/>
+                </a:solidFill>
+                <a:latin typeface="Arial"/>
               </a:rPr>
               <a:t>Third Outline Level</a:t>
             </a:r>
-            <a:endParaRPr b="0" lang="en-US" sz="2000" spc="-1" strike="noStrike">
-              <a:solidFill>
-                <a:schemeClr val="dk1"/>
-              </a:solidFill>
-              <a:latin typeface="Calibri"/>
+            <a:endParaRPr b="0" lang="en-US" sz="2400" spc="-1" strike="noStrike">
+              <a:solidFill>
+                <a:srgbClr val="000000"/>
+              </a:solidFill>
+              <a:latin typeface="Arial"/>
             </a:endParaRPr>
           </a:p>
           <a:p>
@@ -2748,17 +2764,17 @@
             <a:r>
               <a:rPr b="0" lang="en-US" sz="2000" spc="-1" strike="noStrike">
                 <a:solidFill>
-                  <a:schemeClr val="dk1"/>
-                </a:solidFill>
-                <a:latin typeface="Calibri"/>
+                  <a:srgbClr val="000000"/>
+                </a:solidFill>
+                <a:latin typeface="Arial"/>
               </a:rPr>
               <a:t>Fourth Outline Level</a:t>
             </a:r>
             <a:endParaRPr b="0" lang="en-US" sz="2000" spc="-1" strike="noStrike">
               <a:solidFill>
-                <a:schemeClr val="dk1"/>
-              </a:solidFill>
-              <a:latin typeface="Calibri"/>
+                <a:srgbClr val="000000"/>
+              </a:solidFill>
+              <a:latin typeface="Arial"/>
             </a:endParaRPr>
           </a:p>
           <a:p>
@@ -2776,17 +2792,17 @@
             <a:r>
               <a:rPr b="0" lang="en-US" sz="2000" spc="-1" strike="noStrike">
                 <a:solidFill>
-                  <a:schemeClr val="dk1"/>
-                </a:solidFill>
-                <a:latin typeface="Calibri"/>
+                  <a:srgbClr val="000000"/>
+                </a:solidFill>
+                <a:latin typeface="Arial"/>
               </a:rPr>
               <a:t>Fifth Outline Level</a:t>
             </a:r>
             <a:endParaRPr b="0" lang="en-US" sz="2000" spc="-1" strike="noStrike">
               <a:solidFill>
-                <a:schemeClr val="dk1"/>
-              </a:solidFill>
-              <a:latin typeface="Calibri"/>
+                <a:srgbClr val="000000"/>
+              </a:solidFill>
+              <a:latin typeface="Arial"/>
             </a:endParaRPr>
           </a:p>
           <a:p>
@@ -2804,17 +2820,17 @@
             <a:r>
               <a:rPr b="0" lang="en-US" sz="2000" spc="-1" strike="noStrike">
                 <a:solidFill>
-                  <a:schemeClr val="dk1"/>
-                </a:solidFill>
-                <a:latin typeface="Calibri"/>
+                  <a:srgbClr val="000000"/>
+                </a:solidFill>
+                <a:latin typeface="Arial"/>
               </a:rPr>
               <a:t>Sixth Outline Level</a:t>
             </a:r>
             <a:endParaRPr b="0" lang="en-US" sz="2000" spc="-1" strike="noStrike">
               <a:solidFill>
-                <a:schemeClr val="dk1"/>
-              </a:solidFill>
-              <a:latin typeface="Calibri"/>
+                <a:srgbClr val="000000"/>
+              </a:solidFill>
+              <a:latin typeface="Arial"/>
             </a:endParaRPr>
           </a:p>
           <a:p>
@@ -2832,17 +2848,17 @@
             <a:r>
               <a:rPr b="0" lang="en-US" sz="2000" spc="-1" strike="noStrike">
                 <a:solidFill>
-                  <a:schemeClr val="dk1"/>
-                </a:solidFill>
-                <a:latin typeface="Calibri"/>
+                  <a:srgbClr val="000000"/>
+                </a:solidFill>
+                <a:latin typeface="Arial"/>
               </a:rPr>
               <a:t>Seventh Outline Level</a:t>
             </a:r>
             <a:endParaRPr b="0" lang="en-US" sz="2000" spc="-1" strike="noStrike">
               <a:solidFill>
-                <a:schemeClr val="dk1"/>
-              </a:solidFill>
-              <a:latin typeface="Calibri"/>
+                <a:srgbClr val="000000"/>
+              </a:solidFill>
+              <a:latin typeface="Arial"/>
             </a:endParaRPr>
           </a:p>
         </p:txBody>
@@ -2893,7 +2909,7 @@
         <p:spPr>
           <a:xfrm>
             <a:off x="5639040" y="167400"/>
-            <a:ext cx="6366960" cy="3581280"/>
+            <a:ext cx="6366600" cy="3580920"/>
           </a:xfrm>
           <a:prstGeom prst="rect">
             <a:avLst/>
@@ -2912,7 +2928,7 @@
         <p:spPr>
           <a:xfrm>
             <a:off x="640080" y="2331720"/>
-            <a:ext cx="7772040" cy="1005480"/>
+            <a:ext cx="7771680" cy="1005120"/>
           </a:xfrm>
           <a:prstGeom prst="rect">
             <a:avLst/>
@@ -2949,67 +2965,7 @@
                 <a:latin typeface="Cambria"/>
                 <a:ea typeface="Cambria"/>
               </a:rPr>
-              <a:t>A</a:t>
-            </a:r>
-            <a:r>
-              <a:rPr b="1" lang="en-US" sz="5400" spc="-1" strike="noStrike">
-                <a:solidFill>
-                  <a:srgbClr val="ffffff"/>
-                </a:solidFill>
-                <a:latin typeface="Cambria"/>
-                <a:ea typeface="Cambria"/>
-              </a:rPr>
-              <a:t>P</a:t>
-            </a:r>
-            <a:r>
-              <a:rPr b="1" lang="en-US" sz="5400" spc="-1" strike="noStrike">
-                <a:solidFill>
-                  <a:srgbClr val="ffffff"/>
-                </a:solidFill>
-                <a:latin typeface="Cambria"/>
-                <a:ea typeface="Cambria"/>
-              </a:rPr>
-              <a:t>T</a:t>
-            </a:r>
-            <a:r>
-              <a:rPr b="1" lang="en-US" sz="5400" spc="-1" strike="noStrike">
-                <a:solidFill>
-                  <a:srgbClr val="ffffff"/>
-                </a:solidFill>
-                <a:latin typeface="Cambria"/>
-                <a:ea typeface="Cambria"/>
-              </a:rPr>
-              <a:t>E</a:t>
-            </a:r>
-            <a:r>
-              <a:rPr b="1" lang="en-US" sz="5400" spc="-1" strike="noStrike">
-                <a:solidFill>
-                  <a:srgbClr val="ffffff"/>
-                </a:solidFill>
-                <a:latin typeface="Cambria"/>
-                <a:ea typeface="Cambria"/>
-              </a:rPr>
-              <a:t>R</a:t>
-            </a:r>
-            <a:r>
-              <a:rPr b="1" lang="en-US" sz="5400" spc="-1" strike="noStrike">
-                <a:solidFill>
-                  <a:srgbClr val="ffffff"/>
-                </a:solidFill>
-                <a:latin typeface="Cambria"/>
-                <a:ea typeface="Cambria"/>
-              </a:rPr>
-              <a:t>O</a:t>
-            </a:r>
-            <a:r>
-              <a:rPr b="1" lang="en-US" sz="5400" spc="-1" strike="noStrike">
-                <a:solidFill>
-                  <a:srgbClr val="ffffff"/>
-                </a:solidFill>
-                <a:latin typeface="Cambria"/>
-                <a:ea typeface="Cambria"/>
-              </a:rPr>
-              <a:t>S</a:t>
+              <a:t>APTEROS</a:t>
             </a:r>
             <a:endParaRPr b="0" lang="en-US" sz="5400" spc="-1" strike="noStrike">
               <a:solidFill>
@@ -3029,7 +2985,7 @@
         <p:spPr>
           <a:xfrm>
             <a:off x="640080" y="3246120"/>
-            <a:ext cx="7954920" cy="502560"/>
+            <a:ext cx="7954560" cy="502200"/>
           </a:xfrm>
           <a:prstGeom prst="rect">
             <a:avLst/>
@@ -3086,7 +3042,7 @@
         <p:spPr>
           <a:xfrm>
             <a:off x="640080" y="3886200"/>
-            <a:ext cx="7589160" cy="822600"/>
+            <a:ext cx="7588800" cy="822240"/>
           </a:xfrm>
           <a:prstGeom prst="rect">
             <a:avLst/>
@@ -3123,17 +3079,7 @@
                 <a:latin typeface="Calibri"/>
                 <a:ea typeface="Calibri"/>
               </a:rPr>
-              <a:t>Un seul degré de liberté </a:t>
-            </a:r>
-            <a:r>
-              <a:rPr b="0" i="1" lang="en-US" sz="1400" spc="-1" strike="noStrike">
-                <a:solidFill>
-                  <a:srgbClr val="9fb2d6"/>
-                </a:solidFill>
-                <a:latin typeface="Calibri"/>
-                <a:ea typeface="Calibri"/>
-              </a:rPr>
-              <a:t>commandé : l'altitude (Z).</a:t>
+              <a:t>Un seul degré de liberté commandé : l'altitude (Z).</a:t>
             </a:r>
             <a:endParaRPr b="0" lang="en-US" sz="1400" spc="-1" strike="noStrike">
               <a:solidFill>
@@ -3159,27 +3105,7 @@
                 <a:latin typeface="Calibri"/>
                 <a:ea typeface="Calibri"/>
               </a:rPr>
-              <a:t>Les cinq autres — x, y, roulis, </a:t>
-            </a:r>
-            <a:r>
-              <a:rPr b="0" i="1" lang="en-US" sz="1400" spc="-1" strike="noStrike">
-                <a:solidFill>
-                  <a:srgbClr val="9fb2d6"/>
-                </a:solidFill>
-                <a:latin typeface="Calibri"/>
-                <a:ea typeface="Calibri"/>
-              </a:rPr>
-              <a:t>tangage, lacet — sont </a:t>
-            </a:r>
-            <a:r>
-              <a:rPr b="0" i="1" lang="en-US" sz="1400" spc="-1" strike="noStrike">
-                <a:solidFill>
-                  <a:srgbClr val="9fb2d6"/>
-                </a:solidFill>
-                <a:latin typeface="Calibri"/>
-                <a:ea typeface="Calibri"/>
-              </a:rPr>
-              <a:t>maintenus à zéro.</a:t>
+              <a:t>Les cinq autres — x, y, roulis, tangage, lacet — sont maintenus à zéro.</a:t>
             </a:r>
             <a:endParaRPr b="0" lang="en-US" sz="1400" spc="-1" strike="noStrike">
               <a:solidFill>
@@ -3198,8 +3124,8 @@
         </p:nvSpPr>
         <p:spPr>
           <a:xfrm>
-            <a:off x="640080" y="6035040"/>
-            <a:ext cx="5486040" cy="365400"/>
+            <a:off x="229320" y="5807160"/>
+            <a:ext cx="5485680" cy="365040"/>
           </a:xfrm>
           <a:prstGeom prst="rect">
             <a:avLst/>
@@ -3236,7 +3162,7 @@
                 <a:latin typeface="Calibri"/>
                 <a:ea typeface="Calibri"/>
               </a:rPr>
-              <a:t>J</a:t>
+              <a:t>Bryan-Sowanna Ing </a:t>
             </a:r>
             <a:r>
               <a:rPr b="0" lang="en-US" sz="1300" spc="-1" strike="noStrike">
@@ -3246,173 +3172,14 @@
                 <a:latin typeface="Calibri"/>
                 <a:ea typeface="Calibri"/>
               </a:rPr>
-              <a:t>u</a:t>
-            </a:r>
-            <a:r>
-              <a:rPr b="0" lang="en-US" sz="1300" spc="-1" strike="noStrike">
-                <a:solidFill>
-                  <a:srgbClr val="6e7fa3"/>
-                </a:solidFill>
-                <a:latin typeface="Calibri"/>
-                <a:ea typeface="Calibri"/>
-              </a:rPr>
-              <a:t>li</a:t>
-            </a:r>
-            <a:r>
-              <a:rPr b="0" lang="en-US" sz="1300" spc="-1" strike="noStrike">
-                <a:solidFill>
-                  <a:srgbClr val="6e7fa3"/>
-                </a:solidFill>
-                <a:latin typeface="Calibri"/>
-                <a:ea typeface="Calibri"/>
-              </a:rPr>
-              <a:t>e</a:t>
-            </a:r>
-            <a:r>
-              <a:rPr b="0" lang="en-US" sz="1300" spc="-1" strike="noStrike">
-                <a:solidFill>
-                  <a:srgbClr val="6e7fa3"/>
-                </a:solidFill>
-                <a:latin typeface="Calibri"/>
-                <a:ea typeface="Calibri"/>
-              </a:rPr>
-              <a:t>n </a:t>
-            </a:r>
-            <a:r>
-              <a:rPr b="0" lang="en-US" sz="1300" spc="-1" strike="noStrike">
-                <a:solidFill>
-                  <a:srgbClr val="6e7fa3"/>
-                </a:solidFill>
-                <a:latin typeface="Calibri"/>
-                <a:ea typeface="Calibri"/>
-              </a:rPr>
-              <a:t>T</a:t>
-            </a:r>
-            <a:r>
-              <a:rPr b="0" lang="en-US" sz="1300" spc="-1" strike="noStrike">
-                <a:solidFill>
-                  <a:srgbClr val="6e7fa3"/>
-                </a:solidFill>
-                <a:latin typeface="Calibri"/>
-                <a:ea typeface="Calibri"/>
-              </a:rPr>
-              <a:t>h</a:t>
-            </a:r>
-            <a:r>
-              <a:rPr b="0" lang="en-US" sz="1300" spc="-1" strike="noStrike">
-                <a:solidFill>
-                  <a:srgbClr val="6e7fa3"/>
-                </a:solidFill>
-                <a:latin typeface="Calibri"/>
-                <a:ea typeface="Calibri"/>
-              </a:rPr>
-              <a:t>o</a:t>
-            </a:r>
-            <a:r>
-              <a:rPr b="0" lang="en-US" sz="1300" spc="-1" strike="noStrike">
-                <a:solidFill>
-                  <a:srgbClr val="6e7fa3"/>
-                </a:solidFill>
-                <a:latin typeface="Calibri"/>
-                <a:ea typeface="Calibri"/>
-              </a:rPr>
-              <a:t>m</a:t>
-            </a:r>
-            <a:r>
-              <a:rPr b="0" lang="en-US" sz="1300" spc="-1" strike="noStrike">
-                <a:solidFill>
-                  <a:srgbClr val="6e7fa3"/>
-                </a:solidFill>
-                <a:latin typeface="Calibri"/>
-                <a:ea typeface="Calibri"/>
-              </a:rPr>
-              <a:t>a</a:t>
-            </a:r>
-            <a:r>
-              <a:rPr b="0" lang="en-US" sz="1300" spc="-1" strike="noStrike">
-                <a:solidFill>
-                  <a:srgbClr val="6e7fa3"/>
-                </a:solidFill>
-                <a:latin typeface="Calibri"/>
-                <a:ea typeface="Calibri"/>
-              </a:rPr>
-              <a:t>s  </a:t>
-            </a:r>
-            <a:r>
-              <a:rPr b="0" lang="en-US" sz="1300" spc="-1" strike="noStrike">
-                <a:solidFill>
-                  <a:srgbClr val="6e7fa3"/>
-                </a:solidFill>
-                <a:latin typeface="Calibri"/>
-                <a:ea typeface="Calibri"/>
-              </a:rPr>
-              <a:t>—</a:t>
-            </a:r>
-            <a:r>
-              <a:rPr b="0" lang="en-US" sz="1300" spc="-1" strike="noStrike">
-                <a:solidFill>
-                  <a:srgbClr val="6e7fa3"/>
-                </a:solidFill>
-                <a:latin typeface="Calibri"/>
-                <a:ea typeface="Calibri"/>
-              </a:rPr>
-              <a:t>  </a:t>
-            </a:r>
-            <a:r>
-              <a:rPr b="0" lang="en-US" sz="1300" spc="-1" strike="noStrike">
-                <a:solidFill>
-                  <a:srgbClr val="6e7fa3"/>
-                </a:solidFill>
-                <a:latin typeface="Calibri"/>
-                <a:ea typeface="Calibri"/>
-              </a:rPr>
-              <a:t>E</a:t>
-            </a:r>
-            <a:r>
-              <a:rPr b="0" lang="en-US" sz="1300" spc="-1" strike="noStrike">
-                <a:solidFill>
-                  <a:srgbClr val="6e7fa3"/>
-                </a:solidFill>
-                <a:latin typeface="Calibri"/>
-                <a:ea typeface="Calibri"/>
-              </a:rPr>
-              <a:t>N</a:t>
-            </a:r>
-            <a:r>
-              <a:rPr b="0" lang="en-US" sz="1300" spc="-1" strike="noStrike">
-                <a:solidFill>
-                  <a:srgbClr val="6e7fa3"/>
-                </a:solidFill>
-                <a:latin typeface="Calibri"/>
-                <a:ea typeface="Calibri"/>
-              </a:rPr>
-              <a:t>S</a:t>
-            </a:r>
-            <a:r>
-              <a:rPr b="0" lang="en-US" sz="1300" spc="-1" strike="noStrike">
-                <a:solidFill>
-                  <a:srgbClr val="6e7fa3"/>
-                </a:solidFill>
-                <a:latin typeface="Calibri"/>
-                <a:ea typeface="Calibri"/>
-              </a:rPr>
-              <a:t>E</a:t>
-            </a:r>
-            <a:r>
-              <a:rPr b="0" lang="en-US" sz="1300" spc="-1" strike="noStrike">
-                <a:solidFill>
-                  <a:srgbClr val="6e7fa3"/>
-                </a:solidFill>
-                <a:latin typeface="Calibri"/>
-                <a:ea typeface="Calibri"/>
-              </a:rPr>
-              <a:t>A</a:t>
+              <a:t>—  ENSEA</a:t>
             </a:r>
             <a:endParaRPr b="0" lang="en-US" sz="1300" spc="-1" strike="noStrike">
               <a:solidFill>
                 <a:srgbClr val="ffffff"/>
               </a:solidFill>
               <a:latin typeface="Arial"/>
+              <a:ea typeface="Noto Sans CJK SC"/>
             </a:endParaRPr>
           </a:p>
           <a:p>
@@ -3432,8 +3199,25 @@
                 <a:latin typeface="Calibri"/>
                 <a:ea typeface="Calibri"/>
               </a:rPr>
-              <a:t>J</a:t>
-            </a:r>
+              <a:t>Margaux Laplante —  ENSEA</a:t>
+            </a:r>
+            <a:endParaRPr b="0" lang="en-US" sz="1300" spc="-1" strike="noStrike">
+              <a:solidFill>
+                <a:srgbClr val="ffffff"/>
+              </a:solidFill>
+              <a:latin typeface="Arial"/>
+              <a:ea typeface="Noto Sans CJK SC"/>
+            </a:endParaRPr>
+          </a:p>
+          <a:p>
+            <a:pPr defTabSz="914400">
+              <a:lnSpc>
+                <a:spcPct val="100000"/>
+              </a:lnSpc>
+              <a:tabLst>
+                <a:tab algn="l" pos="0"/>
+              </a:tabLst>
+            </a:pPr>
             <a:r>
               <a:rPr b="0" lang="en-US" sz="1300" spc="-1" strike="noStrike">
                 <a:solidFill>
@@ -3442,8 +3226,25 @@
                 <a:latin typeface="Calibri"/>
                 <a:ea typeface="Calibri"/>
               </a:rPr>
-              <a:t>o</a:t>
-            </a:r>
+              <a:t>Sara Bailleul —  ENSEA</a:t>
+            </a:r>
+            <a:endParaRPr b="0" lang="en-US" sz="1300" spc="-1" strike="noStrike">
+              <a:solidFill>
+                <a:srgbClr val="ffffff"/>
+              </a:solidFill>
+              <a:latin typeface="Arial"/>
+              <a:ea typeface="Noto Sans CJK SC"/>
+            </a:endParaRPr>
+          </a:p>
+          <a:p>
+            <a:pPr defTabSz="914400">
+              <a:lnSpc>
+                <a:spcPct val="100000"/>
+              </a:lnSpc>
+              <a:tabLst>
+                <a:tab algn="l" pos="0"/>
+              </a:tabLst>
+            </a:pPr>
             <a:r>
               <a:rPr b="0" lang="en-US" sz="1300" spc="-1" strike="noStrike">
                 <a:solidFill>
@@ -3452,8 +3253,25 @@
                 <a:latin typeface="Calibri"/>
                 <a:ea typeface="Calibri"/>
               </a:rPr>
-              <a:t>ã</a:t>
-            </a:r>
+              <a:t>Julien Thomas  —  ENSEA</a:t>
+            </a:r>
+            <a:endParaRPr b="0" lang="en-US" sz="1300" spc="-1" strike="noStrike">
+              <a:solidFill>
+                <a:srgbClr val="ffffff"/>
+              </a:solidFill>
+              <a:latin typeface="Arial"/>
+              <a:ea typeface="Noto Sans CJK SC"/>
+            </a:endParaRPr>
+          </a:p>
+          <a:p>
+            <a:pPr defTabSz="914400">
+              <a:lnSpc>
+                <a:spcPct val="100000"/>
+              </a:lnSpc>
+              <a:tabLst>
+                <a:tab algn="l" pos="0"/>
+              </a:tabLst>
+            </a:pPr>
             <a:r>
               <a:rPr b="0" lang="en-US" sz="1300" spc="-1" strike="noStrike">
                 <a:solidFill>
@@ -3462,163 +3280,14 @@
                 <a:latin typeface="Calibri"/>
                 <a:ea typeface="Calibri"/>
               </a:rPr>
-              <a:t>o </a:t>
-            </a:r>
-            <a:r>
-              <a:rPr b="0" lang="en-US" sz="1300" spc="-1" strike="noStrike">
-                <a:solidFill>
-                  <a:srgbClr val="6e7fa3"/>
-                </a:solidFill>
-                <a:latin typeface="Calibri"/>
-                <a:ea typeface="Calibri"/>
-              </a:rPr>
-              <a:t>C</a:t>
-            </a:r>
-            <a:r>
-              <a:rPr b="0" lang="en-US" sz="1300" spc="-1" strike="noStrike">
-                <a:solidFill>
-                  <a:srgbClr val="6e7fa3"/>
-                </a:solidFill>
-                <a:latin typeface="Calibri"/>
-                <a:ea typeface="Calibri"/>
-              </a:rPr>
-              <a:t>e</a:t>
-            </a:r>
-            <a:r>
-              <a:rPr b="0" lang="en-US" sz="1300" spc="-1" strike="noStrike">
-                <a:solidFill>
-                  <a:srgbClr val="6e7fa3"/>
-                </a:solidFill>
-                <a:latin typeface="Calibri"/>
-                <a:ea typeface="Calibri"/>
-              </a:rPr>
-              <a:t>r</a:t>
-            </a:r>
-            <a:r>
-              <a:rPr b="0" lang="en-US" sz="1300" spc="-1" strike="noStrike">
-                <a:solidFill>
-                  <a:srgbClr val="6e7fa3"/>
-                </a:solidFill>
-                <a:latin typeface="Calibri"/>
-                <a:ea typeface="Calibri"/>
-              </a:rPr>
-              <a:t>q</a:t>
-            </a:r>
-            <a:r>
-              <a:rPr b="0" lang="en-US" sz="1300" spc="-1" strike="noStrike">
-                <a:solidFill>
-                  <a:srgbClr val="6e7fa3"/>
-                </a:solidFill>
-                <a:latin typeface="Calibri"/>
-                <a:ea typeface="Calibri"/>
-              </a:rPr>
-              <a:t>u</a:t>
-            </a:r>
-            <a:r>
-              <a:rPr b="0" lang="en-US" sz="1300" spc="-1" strike="noStrike">
-                <a:solidFill>
-                  <a:srgbClr val="6e7fa3"/>
-                </a:solidFill>
-                <a:latin typeface="Calibri"/>
-                <a:ea typeface="Calibri"/>
-              </a:rPr>
-              <a:t>ei</a:t>
-            </a:r>
-            <a:r>
-              <a:rPr b="0" lang="en-US" sz="1300" spc="-1" strike="noStrike">
-                <a:solidFill>
-                  <a:srgbClr val="6e7fa3"/>
-                </a:solidFill>
-                <a:latin typeface="Calibri"/>
-                <a:ea typeface="Calibri"/>
-              </a:rPr>
-              <a:t>r</a:t>
-            </a:r>
-            <a:r>
-              <a:rPr b="0" lang="en-US" sz="1300" spc="-1" strike="noStrike">
-                <a:solidFill>
-                  <a:srgbClr val="6e7fa3"/>
-                </a:solidFill>
-                <a:latin typeface="Calibri"/>
-                <a:ea typeface="Calibri"/>
-              </a:rPr>
-              <a:t>a </a:t>
-            </a:r>
-            <a:r>
-              <a:rPr b="0" lang="en-US" sz="1300" spc="-1" strike="noStrike">
-                <a:solidFill>
-                  <a:srgbClr val="6e7fa3"/>
-                </a:solidFill>
-                <a:latin typeface="Calibri"/>
-                <a:ea typeface="Calibri"/>
-              </a:rPr>
-              <a:t>—</a:t>
-            </a:r>
-            <a:r>
-              <a:rPr b="0" lang="en-US" sz="1300" spc="-1" strike="noStrike">
-                <a:solidFill>
-                  <a:srgbClr val="6e7fa3"/>
-                </a:solidFill>
-                <a:latin typeface="Calibri"/>
-                <a:ea typeface="Calibri"/>
-              </a:rPr>
-              <a:t> </a:t>
-            </a:r>
-            <a:r>
-              <a:rPr b="0" lang="en-US" sz="1300" spc="-1" strike="noStrike">
-                <a:solidFill>
-                  <a:srgbClr val="6e7fa3"/>
-                </a:solidFill>
-                <a:latin typeface="Calibri"/>
-                <a:ea typeface="Calibri"/>
-              </a:rPr>
-              <a:t>E</a:t>
-            </a:r>
-            <a:r>
-              <a:rPr b="0" lang="en-US" sz="1300" spc="-1" strike="noStrike">
-                <a:solidFill>
-                  <a:srgbClr val="6e7fa3"/>
-                </a:solidFill>
-                <a:latin typeface="Calibri"/>
-                <a:ea typeface="Calibri"/>
-              </a:rPr>
-              <a:t>N</a:t>
-            </a:r>
-            <a:r>
-              <a:rPr b="0" lang="en-US" sz="1300" spc="-1" strike="noStrike">
-                <a:solidFill>
-                  <a:srgbClr val="6e7fa3"/>
-                </a:solidFill>
-                <a:latin typeface="Calibri"/>
-                <a:ea typeface="Calibri"/>
-              </a:rPr>
-              <a:t>S</a:t>
-            </a:r>
-            <a:r>
-              <a:rPr b="0" lang="en-US" sz="1300" spc="-1" strike="noStrike">
-                <a:solidFill>
-                  <a:srgbClr val="6e7fa3"/>
-                </a:solidFill>
-                <a:latin typeface="Calibri"/>
-                <a:ea typeface="Calibri"/>
-              </a:rPr>
-              <a:t>E</a:t>
-            </a:r>
-            <a:r>
-              <a:rPr b="0" lang="en-US" sz="1300" spc="-1" strike="noStrike">
-                <a:solidFill>
-                  <a:srgbClr val="6e7fa3"/>
-                </a:solidFill>
-                <a:latin typeface="Calibri"/>
-                <a:ea typeface="Calibri"/>
-              </a:rPr>
-              <a:t>A</a:t>
+              <a:t>João Cerqueira — ENSEA</a:t>
             </a:r>
             <a:endParaRPr b="0" lang="en-US" sz="1300" spc="-1" strike="noStrike">
               <a:solidFill>
                 <a:srgbClr val="ffffff"/>
               </a:solidFill>
               <a:latin typeface="Arial"/>
+              <a:ea typeface="Noto Sans CJK SC"/>
             </a:endParaRPr>
           </a:p>
         </p:txBody>
@@ -3632,27 +3301,32 @@
         <p:spPr>
           <a:xfrm>
             <a:off x="5943600" y="1112400"/>
-            <a:ext cx="2468520" cy="2468520"/>
-          </a:xfrm>
-          <a:prstGeom prst="rect">
-            <a:avLst/>
-          </a:prstGeom>
-          <a:noFill/>
-          <a:ln w="0">
-            <a:noFill/>
-          </a:ln>
-        </p:spPr>
-        <p:style>
-          <a:lnRef idx="0"/>
-          <a:fillRef idx="0"/>
-          <a:effectRef idx="0"/>
-          <a:fontRef idx="minor"/>
-        </p:style>
-        <p:txBody>
-          <a:bodyPr numCol="1" spcCol="0" anchor="t">
-            <a:noAutofit/>
-          </a:bodyPr>
-          <a:p>
+            <a:ext cx="2468160" cy="2468160"/>
+          </a:xfrm>
+          <a:prstGeom prst="rect">
+            <a:avLst/>
+          </a:prstGeom>
+          <a:noFill/>
+          <a:ln w="0">
+            <a:noFill/>
+          </a:ln>
+        </p:spPr>
+        <p:style>
+          <a:lnRef idx="0"/>
+          <a:fillRef idx="0"/>
+          <a:effectRef idx="0"/>
+          <a:fontRef idx="minor"/>
+        </p:style>
+        <p:txBody>
+          <a:bodyPr numCol="1" spcCol="0" lIns="90000" rIns="90000" tIns="45000" bIns="45000" anchor="t">
+            <a:noAutofit/>
+          </a:bodyPr>
+          <a:p>
+            <a:pPr>
+              <a:lnSpc>
+                <a:spcPct val="100000"/>
+              </a:lnSpc>
+            </a:pPr>
             <a:endParaRPr b="0" lang="fr-FR" sz="1800" spc="-1" strike="noStrike">
               <a:solidFill>
                 <a:schemeClr val="dk1"/>
@@ -3670,13 +3344,13 @@
         </p:nvPicPr>
         <p:blipFill>
           <a:blip r:embed="rId2"/>
-          <a:srcRect l="40576" t="41096" r="39874" b="33992"/>
+          <a:srcRect l="40571" t="41091" r="39868" b="33988"/>
           <a:stretch/>
         </p:blipFill>
         <p:spPr>
           <a:xfrm>
             <a:off x="9875520" y="3429000"/>
-            <a:ext cx="1823400" cy="3291120"/>
+            <a:ext cx="1823040" cy="3290760"/>
           </a:xfrm>
           <a:prstGeom prst="rect">
             <a:avLst/>
@@ -3725,7 +3399,7 @@
         <p:spPr>
           <a:xfrm>
             <a:off x="609480" y="365760"/>
-            <a:ext cx="10972440" cy="731160"/>
+            <a:ext cx="10972080" cy="730800"/>
           </a:xfrm>
           <a:prstGeom prst="rect">
             <a:avLst/>
@@ -3779,7 +3453,7 @@
         <p:spPr>
           <a:xfrm>
             <a:off x="609480" y="1097280"/>
-            <a:ext cx="10972440" cy="365400"/>
+            <a:ext cx="10972080" cy="365040"/>
           </a:xfrm>
           <a:prstGeom prst="rect">
             <a:avLst/>
@@ -3837,7 +3511,7 @@
         <p:spPr>
           <a:xfrm>
             <a:off x="609480" y="1706760"/>
-            <a:ext cx="3900960" cy="3303720"/>
+            <a:ext cx="3900600" cy="3303360"/>
           </a:xfrm>
           <a:prstGeom prst="rect">
             <a:avLst/>
@@ -3856,7 +3530,7 @@
         <p:spPr>
           <a:xfrm>
             <a:off x="609480" y="5291280"/>
-            <a:ext cx="207000" cy="207000"/>
+            <a:ext cx="206640" cy="206640"/>
           </a:xfrm>
           <a:prstGeom prst="ellipse">
             <a:avLst/>
@@ -3882,6 +3556,11 @@
             <a:noAutofit/>
           </a:bodyPr>
           <a:p>
+            <a:pPr>
+              <a:lnSpc>
+                <a:spcPct val="100000"/>
+              </a:lnSpc>
+            </a:pPr>
             <a:endParaRPr b="0" lang="en-US" sz="1800" spc="-1" strike="noStrike">
               <a:solidFill>
                 <a:srgbClr val="ffffff"/>
@@ -3900,7 +3579,7 @@
         <p:spPr>
           <a:xfrm>
             <a:off x="975240" y="5242680"/>
-            <a:ext cx="3535200" cy="316800"/>
+            <a:ext cx="3534840" cy="316440"/>
           </a:xfrm>
           <a:prstGeom prst="rect">
             <a:avLst/>
@@ -3954,7 +3633,7 @@
         <p:spPr>
           <a:xfrm>
             <a:off x="609480" y="5681520"/>
-            <a:ext cx="207000" cy="207000"/>
+            <a:ext cx="206640" cy="206640"/>
           </a:xfrm>
           <a:prstGeom prst="ellipse">
             <a:avLst/>
@@ -3980,6 +3659,11 @@
             <a:noAutofit/>
           </a:bodyPr>
           <a:p>
+            <a:pPr>
+              <a:lnSpc>
+                <a:spcPct val="100000"/>
+              </a:lnSpc>
+            </a:pPr>
             <a:endParaRPr b="0" lang="en-US" sz="1800" spc="-1" strike="noStrike">
               <a:solidFill>
                 <a:srgbClr val="ffffff"/>
@@ -3998,7 +3682,7 @@
         <p:spPr>
           <a:xfrm>
             <a:off x="975240" y="5632560"/>
-            <a:ext cx="3535200" cy="316800"/>
+            <a:ext cx="3534840" cy="316440"/>
           </a:xfrm>
           <a:prstGeom prst="rect">
             <a:avLst/>
@@ -4052,7 +3736,7 @@
         <p:spPr>
           <a:xfrm>
             <a:off x="609480" y="6022800"/>
-            <a:ext cx="3900960" cy="316800"/>
+            <a:ext cx="3900600" cy="316440"/>
           </a:xfrm>
           <a:prstGeom prst="rect">
             <a:avLst/>
@@ -4106,7 +3790,7 @@
         <p:spPr>
           <a:xfrm>
             <a:off x="5242680" y="1706760"/>
-            <a:ext cx="6339600" cy="877320"/>
+            <a:ext cx="6339240" cy="876960"/>
           </a:xfrm>
           <a:prstGeom prst="roundRect">
             <a:avLst>
@@ -4134,6 +3818,11 @@
             <a:noAutofit/>
           </a:bodyPr>
           <a:p>
+            <a:pPr>
+              <a:lnSpc>
+                <a:spcPct val="100000"/>
+              </a:lnSpc>
+            </a:pPr>
             <a:endParaRPr b="0" lang="en-US" sz="1800" spc="-1" strike="noStrike">
               <a:solidFill>
                 <a:srgbClr val="000000"/>
@@ -4152,7 +3841,7 @@
         <p:spPr>
           <a:xfrm>
             <a:off x="5425560" y="1938600"/>
-            <a:ext cx="414000" cy="414000"/>
+            <a:ext cx="413640" cy="413640"/>
           </a:xfrm>
           <a:prstGeom prst="ellipse">
             <a:avLst/>
@@ -4178,6 +3867,11 @@
             <a:noAutofit/>
           </a:bodyPr>
           <a:p>
+            <a:pPr>
+              <a:lnSpc>
+                <a:spcPct val="100000"/>
+              </a:lnSpc>
+            </a:pPr>
             <a:endParaRPr b="0" lang="en-US" sz="1800" spc="-1" strike="noStrike">
               <a:solidFill>
                 <a:srgbClr val="ffffff"/>
@@ -4196,7 +3890,7 @@
         <p:spPr>
           <a:xfrm>
             <a:off x="5425560" y="1938600"/>
-            <a:ext cx="414000" cy="414000"/>
+            <a:ext cx="413640" cy="413640"/>
           </a:xfrm>
           <a:prstGeom prst="rect">
             <a:avLst/>
@@ -4250,7 +3944,7 @@
         <p:spPr>
           <a:xfrm>
             <a:off x="6035040" y="1792080"/>
-            <a:ext cx="5364000" cy="292320"/>
+            <a:ext cx="5363640" cy="291960"/>
           </a:xfrm>
           <a:prstGeom prst="rect">
             <a:avLst/>
@@ -4304,7 +3998,7 @@
         <p:spPr>
           <a:xfrm>
             <a:off x="6035040" y="2072520"/>
-            <a:ext cx="5364000" cy="438480"/>
+            <a:ext cx="5363640" cy="438120"/>
           </a:xfrm>
           <a:prstGeom prst="rect">
             <a:avLst/>
@@ -4358,7 +4052,7 @@
         <p:spPr>
           <a:xfrm>
             <a:off x="5242680" y="2730960"/>
-            <a:ext cx="6339600" cy="877320"/>
+            <a:ext cx="6339240" cy="876960"/>
           </a:xfrm>
           <a:prstGeom prst="roundRect">
             <a:avLst>
@@ -4386,6 +4080,11 @@
             <a:noAutofit/>
           </a:bodyPr>
           <a:p>
+            <a:pPr>
+              <a:lnSpc>
+                <a:spcPct val="100000"/>
+              </a:lnSpc>
+            </a:pPr>
             <a:endParaRPr b="0" lang="en-US" sz="1800" spc="-1" strike="noStrike">
               <a:solidFill>
                 <a:srgbClr val="000000"/>
@@ -4404,7 +4103,7 @@
         <p:spPr>
           <a:xfrm>
             <a:off x="5425560" y="2962800"/>
-            <a:ext cx="414000" cy="414000"/>
+            <a:ext cx="413640" cy="413640"/>
           </a:xfrm>
           <a:prstGeom prst="ellipse">
             <a:avLst/>
@@ -4430,6 +4129,11 @@
             <a:noAutofit/>
           </a:bodyPr>
           <a:p>
+            <a:pPr>
+              <a:lnSpc>
+                <a:spcPct val="100000"/>
+              </a:lnSpc>
+            </a:pPr>
             <a:endParaRPr b="0" lang="en-US" sz="1800" spc="-1" strike="noStrike">
               <a:solidFill>
                 <a:srgbClr val="ffffff"/>
@@ -4448,7 +4152,7 @@
         <p:spPr>
           <a:xfrm>
             <a:off x="5425560" y="2962800"/>
-            <a:ext cx="414000" cy="414000"/>
+            <a:ext cx="413640" cy="413640"/>
           </a:xfrm>
           <a:prstGeom prst="rect">
             <a:avLst/>
@@ -4502,7 +4206,7 @@
         <p:spPr>
           <a:xfrm>
             <a:off x="6035040" y="2816280"/>
-            <a:ext cx="5364000" cy="292320"/>
+            <a:ext cx="5363640" cy="291960"/>
           </a:xfrm>
           <a:prstGeom prst="rect">
             <a:avLst/>
@@ -4556,7 +4260,7 @@
         <p:spPr>
           <a:xfrm>
             <a:off x="6035040" y="3096720"/>
-            <a:ext cx="5364000" cy="438480"/>
+            <a:ext cx="5363640" cy="438120"/>
           </a:xfrm>
           <a:prstGeom prst="rect">
             <a:avLst/>
@@ -4610,7 +4314,7 @@
         <p:spPr>
           <a:xfrm>
             <a:off x="5242680" y="3755160"/>
-            <a:ext cx="6339600" cy="877320"/>
+            <a:ext cx="6339240" cy="876960"/>
           </a:xfrm>
           <a:prstGeom prst="roundRect">
             <a:avLst>
@@ -4638,6 +4342,11 @@
             <a:noAutofit/>
           </a:bodyPr>
           <a:p>
+            <a:pPr>
+              <a:lnSpc>
+                <a:spcPct val="100000"/>
+              </a:lnSpc>
+            </a:pPr>
             <a:endParaRPr b="0" lang="en-US" sz="1800" spc="-1" strike="noStrike">
               <a:solidFill>
                 <a:srgbClr val="000000"/>
@@ -4656,7 +4365,7 @@
         <p:spPr>
           <a:xfrm>
             <a:off x="5425560" y="3986640"/>
-            <a:ext cx="414000" cy="414000"/>
+            <a:ext cx="413640" cy="413640"/>
           </a:xfrm>
           <a:prstGeom prst="ellipse">
             <a:avLst/>
@@ -4682,6 +4391,11 @@
             <a:noAutofit/>
           </a:bodyPr>
           <a:p>
+            <a:pPr>
+              <a:lnSpc>
+                <a:spcPct val="100000"/>
+              </a:lnSpc>
+            </a:pPr>
             <a:endParaRPr b="0" lang="en-US" sz="1800" spc="-1" strike="noStrike">
               <a:solidFill>
                 <a:srgbClr val="ffffff"/>
@@ -4700,7 +4414,7 @@
         <p:spPr>
           <a:xfrm>
             <a:off x="5425560" y="3986640"/>
-            <a:ext cx="414000" cy="414000"/>
+            <a:ext cx="413640" cy="413640"/>
           </a:xfrm>
           <a:prstGeom prst="rect">
             <a:avLst/>
@@ -4754,7 +4468,7 @@
         <p:spPr>
           <a:xfrm>
             <a:off x="6035040" y="3840480"/>
-            <a:ext cx="5364000" cy="292320"/>
+            <a:ext cx="5363640" cy="291960"/>
           </a:xfrm>
           <a:prstGeom prst="rect">
             <a:avLst/>
@@ -4808,7 +4522,7 @@
         <p:spPr>
           <a:xfrm>
             <a:off x="6035040" y="4120920"/>
-            <a:ext cx="5364000" cy="438480"/>
+            <a:ext cx="5363640" cy="438120"/>
           </a:xfrm>
           <a:prstGeom prst="rect">
             <a:avLst/>
@@ -4862,7 +4576,7 @@
         <p:spPr>
           <a:xfrm>
             <a:off x="5242680" y="4779360"/>
-            <a:ext cx="6339600" cy="877320"/>
+            <a:ext cx="6339240" cy="876960"/>
           </a:xfrm>
           <a:prstGeom prst="roundRect">
             <a:avLst>
@@ -4890,6 +4604,11 @@
             <a:noAutofit/>
           </a:bodyPr>
           <a:p>
+            <a:pPr>
+              <a:lnSpc>
+                <a:spcPct val="100000"/>
+              </a:lnSpc>
+            </a:pPr>
             <a:endParaRPr b="0" lang="en-US" sz="1800" spc="-1" strike="noStrike">
               <a:solidFill>
                 <a:srgbClr val="000000"/>
@@ -4908,7 +4627,7 @@
         <p:spPr>
           <a:xfrm>
             <a:off x="5425560" y="5010840"/>
-            <a:ext cx="414000" cy="414000"/>
+            <a:ext cx="413640" cy="413640"/>
           </a:xfrm>
           <a:prstGeom prst="ellipse">
             <a:avLst/>
@@ -4934,6 +4653,11 @@
             <a:noAutofit/>
           </a:bodyPr>
           <a:p>
+            <a:pPr>
+              <a:lnSpc>
+                <a:spcPct val="100000"/>
+              </a:lnSpc>
+            </a:pPr>
             <a:endParaRPr b="0" lang="en-US" sz="1800" spc="-1" strike="noStrike">
               <a:solidFill>
                 <a:srgbClr val="ffffff"/>
@@ -4952,7 +4676,7 @@
         <p:spPr>
           <a:xfrm>
             <a:off x="5425560" y="5010840"/>
-            <a:ext cx="414000" cy="414000"/>
+            <a:ext cx="413640" cy="413640"/>
           </a:xfrm>
           <a:prstGeom prst="rect">
             <a:avLst/>
@@ -5006,7 +4730,7 @@
         <p:spPr>
           <a:xfrm>
             <a:off x="6035040" y="4864680"/>
-            <a:ext cx="5364000" cy="292320"/>
+            <a:ext cx="5363640" cy="291960"/>
           </a:xfrm>
           <a:prstGeom prst="rect">
             <a:avLst/>
@@ -5060,7 +4784,7 @@
         <p:spPr>
           <a:xfrm>
             <a:off x="6035040" y="5145120"/>
-            <a:ext cx="5364000" cy="438480"/>
+            <a:ext cx="5363640" cy="438120"/>
           </a:xfrm>
           <a:prstGeom prst="rect">
             <a:avLst/>
@@ -5114,7 +4838,7 @@
         <p:spPr>
           <a:xfrm>
             <a:off x="5242680" y="5852160"/>
-            <a:ext cx="6339600" cy="487440"/>
+            <a:ext cx="6339240" cy="487080"/>
           </a:xfrm>
           <a:prstGeom prst="rect">
             <a:avLst/>
@@ -5168,16 +4892,15 @@
         <p:spPr>
           <a:xfrm flipV="1">
             <a:off x="2509200" y="2816280"/>
-            <a:ext cx="783000" cy="613080"/>
+            <a:ext cx="783360" cy="613440"/>
           </a:xfrm>
           <a:prstGeom prst="straightConnector1">
             <a:avLst/>
           </a:prstGeom>
-          <a:ln>
+          <a:ln w="0">
             <a:solidFill>
               <a:srgbClr val="ed7d31"/>
             </a:solidFill>
-            <a:round/>
             <a:headEnd len="med" type="triangle" w="med"/>
             <a:tailEnd len="med" type="triangle" w="med"/>
           </a:ln>
@@ -5283,7 +5006,7 @@
         <p:spPr>
           <a:xfrm>
             <a:off x="457200" y="292680"/>
-            <a:ext cx="7772040" cy="639720"/>
+            <a:ext cx="7771680" cy="639360"/>
           </a:xfrm>
           <a:prstGeom prst="rect">
             <a:avLst/>
@@ -5340,7 +5063,7 @@
         <p:spPr>
           <a:xfrm>
             <a:off x="8942760" y="292680"/>
-            <a:ext cx="310680" cy="310680"/>
+            <a:ext cx="310320" cy="310320"/>
           </a:xfrm>
           <a:prstGeom prst="ellipse">
             <a:avLst/>
@@ -5363,6 +5086,11 @@
             <a:noAutofit/>
           </a:bodyPr>
           <a:p>
+            <a:pPr>
+              <a:lnSpc>
+                <a:spcPct val="100000"/>
+              </a:lnSpc>
+            </a:pPr>
             <a:endParaRPr b="0" lang="en-US" sz="1800" spc="-1" strike="noStrike">
               <a:solidFill>
                 <a:srgbClr val="ffffff"/>
@@ -5381,7 +5109,7 @@
         <p:spPr>
           <a:xfrm>
             <a:off x="8942760" y="292680"/>
-            <a:ext cx="310680" cy="310680"/>
+            <a:ext cx="310320" cy="310320"/>
           </a:xfrm>
           <a:prstGeom prst="rect">
             <a:avLst/>
@@ -5438,7 +5166,7 @@
         <p:spPr>
           <a:xfrm>
             <a:off x="9345240" y="292680"/>
-            <a:ext cx="2742840" cy="310680"/>
+            <a:ext cx="2742480" cy="310320"/>
           </a:xfrm>
           <a:prstGeom prst="rect">
             <a:avLst/>
@@ -5505,7 +5233,7 @@
         <p:spPr>
           <a:xfrm>
             <a:off x="457200" y="1371600"/>
-            <a:ext cx="11246760" cy="1599840"/>
+            <a:ext cx="11246400" cy="1599480"/>
           </a:xfrm>
           <a:prstGeom prst="roundRect">
             <a:avLst>
@@ -5530,6 +5258,11 @@
             <a:noAutofit/>
           </a:bodyPr>
           <a:p>
+            <a:pPr>
+              <a:lnSpc>
+                <a:spcPct val="100000"/>
+              </a:lnSpc>
+            </a:pPr>
             <a:endParaRPr b="0" lang="en-US" sz="1800" spc="-1" strike="noStrike">
               <a:solidFill>
                 <a:srgbClr val="000000"/>
@@ -5548,7 +5281,7 @@
         <p:spPr>
           <a:xfrm>
             <a:off x="713160" y="1517760"/>
-            <a:ext cx="10734840" cy="1307160"/>
+            <a:ext cx="10734480" cy="1306800"/>
           </a:xfrm>
           <a:prstGeom prst="rect">
             <a:avLst/>
@@ -5605,7 +5338,7 @@
         <p:spPr>
           <a:xfrm>
             <a:off x="457200" y="3200400"/>
-            <a:ext cx="5440320" cy="2925720"/>
+            <a:ext cx="5439960" cy="2925360"/>
           </a:xfrm>
           <a:prstGeom prst="roundRect">
             <a:avLst>
@@ -5630,6 +5363,11 @@
             <a:noAutofit/>
           </a:bodyPr>
           <a:p>
+            <a:pPr>
+              <a:lnSpc>
+                <a:spcPct val="100000"/>
+              </a:lnSpc>
+            </a:pPr>
             <a:endParaRPr b="0" lang="en-US" sz="1800" spc="-1" strike="noStrike">
               <a:solidFill>
                 <a:srgbClr val="000000"/>
@@ -5648,7 +5386,7 @@
         <p:spPr>
           <a:xfrm>
             <a:off x="658440" y="3346560"/>
-            <a:ext cx="5037840" cy="365400"/>
+            <a:ext cx="5037480" cy="365040"/>
           </a:xfrm>
           <a:prstGeom prst="rect">
             <a:avLst/>
@@ -5705,7 +5443,7 @@
         <p:spPr>
           <a:xfrm>
             <a:off x="658440" y="3730680"/>
-            <a:ext cx="5037840" cy="2248920"/>
+            <a:ext cx="5037480" cy="2248560"/>
           </a:xfrm>
           <a:prstGeom prst="rect">
             <a:avLst/>
@@ -5829,7 +5567,7 @@
         <p:spPr>
           <a:xfrm>
             <a:off x="6172200" y="3200400"/>
-            <a:ext cx="5531760" cy="2925720"/>
+            <a:ext cx="5531400" cy="2925360"/>
           </a:xfrm>
           <a:prstGeom prst="roundRect">
             <a:avLst>
@@ -5854,6 +5592,11 @@
             <a:noAutofit/>
           </a:bodyPr>
           <a:p>
+            <a:pPr>
+              <a:lnSpc>
+                <a:spcPct val="100000"/>
+              </a:lnSpc>
+            </a:pPr>
             <a:endParaRPr b="0" lang="en-US" sz="1800" spc="-1" strike="noStrike">
               <a:solidFill>
                 <a:srgbClr val="000000"/>
@@ -5872,7 +5615,7 @@
         <p:spPr>
           <a:xfrm>
             <a:off x="6373440" y="3346560"/>
-            <a:ext cx="5129280" cy="365400"/>
+            <a:ext cx="5128920" cy="365040"/>
           </a:xfrm>
           <a:prstGeom prst="rect">
             <a:avLst/>
@@ -5929,7 +5672,7 @@
         <p:spPr>
           <a:xfrm>
             <a:off x="6373440" y="3730680"/>
-            <a:ext cx="5129280" cy="2248920"/>
+            <a:ext cx="5128920" cy="2248560"/>
           </a:xfrm>
           <a:prstGeom prst="rect">
             <a:avLst/>
@@ -6053,7 +5796,7 @@
         <p:spPr>
           <a:xfrm>
             <a:off x="11457360" y="6400800"/>
-            <a:ext cx="456840" cy="273960"/>
+            <a:ext cx="456480" cy="273600"/>
           </a:xfrm>
           <a:prstGeom prst="rect">
             <a:avLst/>
@@ -6147,7 +5890,7 @@
         <p:spPr>
           <a:xfrm>
             <a:off x="457200" y="292680"/>
-            <a:ext cx="7772040" cy="639720"/>
+            <a:ext cx="7771680" cy="639360"/>
           </a:xfrm>
           <a:prstGeom prst="rect">
             <a:avLst/>
@@ -6204,7 +5947,7 @@
         <p:spPr>
           <a:xfrm>
             <a:off x="8942760" y="292680"/>
-            <a:ext cx="310680" cy="310680"/>
+            <a:ext cx="310320" cy="310320"/>
           </a:xfrm>
           <a:prstGeom prst="ellipse">
             <a:avLst/>
@@ -6227,6 +5970,11 @@
             <a:noAutofit/>
           </a:bodyPr>
           <a:p>
+            <a:pPr>
+              <a:lnSpc>
+                <a:spcPct val="100000"/>
+              </a:lnSpc>
+            </a:pPr>
             <a:endParaRPr b="0" lang="en-US" sz="1800" spc="-1" strike="noStrike">
               <a:solidFill>
                 <a:srgbClr val="ffffff"/>
@@ -6245,7 +5993,7 @@
         <p:spPr>
           <a:xfrm>
             <a:off x="8942760" y="292680"/>
-            <a:ext cx="310680" cy="310680"/>
+            <a:ext cx="310320" cy="310320"/>
           </a:xfrm>
           <a:prstGeom prst="rect">
             <a:avLst/>
@@ -6302,7 +6050,7 @@
         <p:spPr>
           <a:xfrm>
             <a:off x="9345240" y="292680"/>
-            <a:ext cx="2742840" cy="310680"/>
+            <a:ext cx="2742480" cy="310320"/>
           </a:xfrm>
           <a:prstGeom prst="rect">
             <a:avLst/>
@@ -6369,7 +6117,7 @@
         <p:spPr>
           <a:xfrm>
             <a:off x="457200" y="1371600"/>
-            <a:ext cx="6400440" cy="1782720"/>
+            <a:ext cx="6400080" cy="1782360"/>
           </a:xfrm>
           <a:prstGeom prst="roundRect">
             <a:avLst>
@@ -6394,6 +6142,11 @@
             <a:noAutofit/>
           </a:bodyPr>
           <a:p>
+            <a:pPr>
+              <a:lnSpc>
+                <a:spcPct val="100000"/>
+              </a:lnSpc>
+            </a:pPr>
             <a:endParaRPr b="0" lang="en-US" sz="1800" spc="-1" strike="noStrike">
               <a:solidFill>
                 <a:srgbClr val="000000"/>
@@ -6412,7 +6165,7 @@
         <p:spPr>
           <a:xfrm>
             <a:off x="713160" y="1517760"/>
-            <a:ext cx="5888520" cy="1490040"/>
+            <a:ext cx="5888160" cy="1489680"/>
           </a:xfrm>
           <a:prstGeom prst="rect">
             <a:avLst/>
@@ -6495,7 +6248,7 @@
         <p:spPr>
           <a:xfrm>
             <a:off x="457200" y="3337560"/>
-            <a:ext cx="6400440" cy="2834280"/>
+            <a:ext cx="6400080" cy="2833920"/>
           </a:xfrm>
           <a:prstGeom prst="roundRect">
             <a:avLst>
@@ -6520,6 +6273,11 @@
             <a:noAutofit/>
           </a:bodyPr>
           <a:p>
+            <a:pPr>
+              <a:lnSpc>
+                <a:spcPct val="100000"/>
+              </a:lnSpc>
+            </a:pPr>
             <a:endParaRPr b="0" lang="en-US" sz="1800" spc="-1" strike="noStrike">
               <a:solidFill>
                 <a:srgbClr val="000000"/>
@@ -6538,7 +6296,7 @@
         <p:spPr>
           <a:xfrm>
             <a:off x="658440" y="3483720"/>
-            <a:ext cx="5997960" cy="365400"/>
+            <a:ext cx="5997600" cy="365040"/>
           </a:xfrm>
           <a:prstGeom prst="rect">
             <a:avLst/>
@@ -6595,7 +6353,7 @@
         <p:spPr>
           <a:xfrm>
             <a:off x="658440" y="3867840"/>
-            <a:ext cx="5997960" cy="2157480"/>
+            <a:ext cx="5997600" cy="2157120"/>
           </a:xfrm>
           <a:prstGeom prst="rect">
             <a:avLst/>
@@ -7827,7 +7585,7 @@
         <p:spPr>
           <a:xfrm>
             <a:off x="6995160" y="3154680"/>
-            <a:ext cx="456840" cy="273960"/>
+            <a:ext cx="456480" cy="273600"/>
           </a:xfrm>
           <a:prstGeom prst="rect">
             <a:avLst/>
@@ -7884,7 +7642,7 @@
         <p:spPr>
           <a:xfrm>
             <a:off x="11155680" y="5102280"/>
-            <a:ext cx="273960" cy="273960"/>
+            <a:ext cx="273600" cy="273600"/>
           </a:xfrm>
           <a:prstGeom prst="rect">
             <a:avLst/>
@@ -7941,7 +7699,7 @@
         <p:spPr>
           <a:xfrm>
             <a:off x="7178040" y="5303520"/>
-            <a:ext cx="4388760" cy="273960"/>
+            <a:ext cx="4388400" cy="273600"/>
           </a:xfrm>
           <a:prstGeom prst="rect">
             <a:avLst/>
@@ -7998,7 +7756,7 @@
         <p:spPr>
           <a:xfrm>
             <a:off x="11457360" y="6400800"/>
-            <a:ext cx="456840" cy="273960"/>
+            <a:ext cx="456480" cy="273600"/>
           </a:xfrm>
           <a:prstGeom prst="rect">
             <a:avLst/>
@@ -8092,7 +7850,7 @@
         <p:spPr>
           <a:xfrm>
             <a:off x="457200" y="292680"/>
-            <a:ext cx="7772040" cy="639720"/>
+            <a:ext cx="7771680" cy="639360"/>
           </a:xfrm>
           <a:prstGeom prst="rect">
             <a:avLst/>
@@ -8149,7 +7907,7 @@
         <p:spPr>
           <a:xfrm>
             <a:off x="8942760" y="292680"/>
-            <a:ext cx="310680" cy="310680"/>
+            <a:ext cx="310320" cy="310320"/>
           </a:xfrm>
           <a:prstGeom prst="ellipse">
             <a:avLst/>
@@ -8172,6 +7930,11 @@
             <a:noAutofit/>
           </a:bodyPr>
           <a:p>
+            <a:pPr>
+              <a:lnSpc>
+                <a:spcPct val="100000"/>
+              </a:lnSpc>
+            </a:pPr>
             <a:endParaRPr b="0" lang="en-US" sz="1800" spc="-1" strike="noStrike">
               <a:solidFill>
                 <a:srgbClr val="ffffff"/>
@@ -8190,7 +7953,7 @@
         <p:spPr>
           <a:xfrm>
             <a:off x="8942760" y="292680"/>
-            <a:ext cx="310680" cy="310680"/>
+            <a:ext cx="310320" cy="310320"/>
           </a:xfrm>
           <a:prstGeom prst="rect">
             <a:avLst/>
@@ -8247,7 +8010,7 @@
         <p:spPr>
           <a:xfrm>
             <a:off x="9345240" y="292680"/>
-            <a:ext cx="2742840" cy="310680"/>
+            <a:ext cx="2742480" cy="310320"/>
           </a:xfrm>
           <a:prstGeom prst="rect">
             <a:avLst/>
@@ -8314,7 +8077,7 @@
         <p:spPr>
           <a:xfrm>
             <a:off x="457200" y="1371600"/>
-            <a:ext cx="11246760" cy="1234080"/>
+            <a:ext cx="11246400" cy="1233720"/>
           </a:xfrm>
           <a:prstGeom prst="roundRect">
             <a:avLst>
@@ -8339,6 +8102,11 @@
             <a:noAutofit/>
           </a:bodyPr>
           <a:p>
+            <a:pPr>
+              <a:lnSpc>
+                <a:spcPct val="100000"/>
+              </a:lnSpc>
+            </a:pPr>
             <a:endParaRPr b="0" lang="en-US" sz="1800" spc="-1" strike="noStrike">
               <a:solidFill>
                 <a:srgbClr val="000000"/>
@@ -8357,7 +8125,7 @@
         <p:spPr>
           <a:xfrm>
             <a:off x="713160" y="1517760"/>
-            <a:ext cx="10734840" cy="941400"/>
+            <a:ext cx="10734480" cy="941040"/>
           </a:xfrm>
           <a:prstGeom prst="rect">
             <a:avLst/>
@@ -8414,7 +8182,7 @@
         <p:spPr>
           <a:xfrm>
             <a:off x="457200" y="2880360"/>
-            <a:ext cx="3565800" cy="1416960"/>
+            <a:ext cx="3565440" cy="1416600"/>
           </a:xfrm>
           <a:prstGeom prst="roundRect">
             <a:avLst>
@@ -8439,6 +8207,11 @@
             <a:noAutofit/>
           </a:bodyPr>
           <a:p>
+            <a:pPr>
+              <a:lnSpc>
+                <a:spcPct val="100000"/>
+              </a:lnSpc>
+            </a:pPr>
             <a:endParaRPr b="0" lang="en-US" sz="1800" spc="-1" strike="noStrike">
               <a:solidFill>
                 <a:srgbClr val="000000"/>
@@ -8457,7 +8230,7 @@
         <p:spPr>
           <a:xfrm>
             <a:off x="658440" y="2990160"/>
-            <a:ext cx="914040" cy="822600"/>
+            <a:ext cx="913680" cy="822240"/>
           </a:xfrm>
           <a:prstGeom prst="rect">
             <a:avLst/>
@@ -8514,7 +8287,7 @@
         <p:spPr>
           <a:xfrm>
             <a:off x="1508760" y="3063240"/>
-            <a:ext cx="2331360" cy="1096920"/>
+            <a:ext cx="2331000" cy="1096560"/>
           </a:xfrm>
           <a:prstGeom prst="rect">
             <a:avLst/>
@@ -8600,7 +8373,7 @@
         <p:spPr>
           <a:xfrm>
             <a:off x="4279320" y="2880360"/>
-            <a:ext cx="3565800" cy="1416960"/>
+            <a:ext cx="3565440" cy="1416600"/>
           </a:xfrm>
           <a:prstGeom prst="roundRect">
             <a:avLst>
@@ -8625,6 +8398,11 @@
             <a:noAutofit/>
           </a:bodyPr>
           <a:p>
+            <a:pPr>
+              <a:lnSpc>
+                <a:spcPct val="100000"/>
+              </a:lnSpc>
+            </a:pPr>
             <a:endParaRPr b="0" lang="en-US" sz="1800" spc="-1" strike="noStrike">
               <a:solidFill>
                 <a:srgbClr val="000000"/>
@@ -8643,7 +8421,7 @@
         <p:spPr>
           <a:xfrm>
             <a:off x="4480560" y="2990160"/>
-            <a:ext cx="914040" cy="822600"/>
+            <a:ext cx="913680" cy="822240"/>
           </a:xfrm>
           <a:prstGeom prst="rect">
             <a:avLst/>
@@ -8700,7 +8478,7 @@
         <p:spPr>
           <a:xfrm>
             <a:off x="5330880" y="3063240"/>
-            <a:ext cx="2331360" cy="1096920"/>
+            <a:ext cx="2331000" cy="1096560"/>
           </a:xfrm>
           <a:prstGeom prst="rect">
             <a:avLst/>
@@ -8786,7 +8564,7 @@
         <p:spPr>
           <a:xfrm>
             <a:off x="8101440" y="2880360"/>
-            <a:ext cx="3565800" cy="1416960"/>
+            <a:ext cx="3565440" cy="1416600"/>
           </a:xfrm>
           <a:prstGeom prst="roundRect">
             <a:avLst>
@@ -8811,6 +8589,11 @@
             <a:noAutofit/>
           </a:bodyPr>
           <a:p>
+            <a:pPr>
+              <a:lnSpc>
+                <a:spcPct val="100000"/>
+              </a:lnSpc>
+            </a:pPr>
             <a:endParaRPr b="0" lang="en-US" sz="1800" spc="-1" strike="noStrike">
               <a:solidFill>
                 <a:srgbClr val="000000"/>
@@ -8829,7 +8612,7 @@
         <p:spPr>
           <a:xfrm>
             <a:off x="8302680" y="2990160"/>
-            <a:ext cx="914040" cy="822600"/>
+            <a:ext cx="913680" cy="822240"/>
           </a:xfrm>
           <a:prstGeom prst="rect">
             <a:avLst/>
@@ -8886,7 +8669,7 @@
         <p:spPr>
           <a:xfrm>
             <a:off x="9153000" y="3063240"/>
-            <a:ext cx="2331360" cy="1096920"/>
+            <a:ext cx="2331000" cy="1096560"/>
           </a:xfrm>
           <a:prstGeom prst="rect">
             <a:avLst/>
@@ -8972,7 +8755,7 @@
         <p:spPr>
           <a:xfrm>
             <a:off x="457200" y="4572000"/>
-            <a:ext cx="11246760" cy="1737000"/>
+            <a:ext cx="11246400" cy="1736640"/>
           </a:xfrm>
           <a:prstGeom prst="roundRect">
             <a:avLst>
@@ -8997,6 +8780,11 @@
             <a:noAutofit/>
           </a:bodyPr>
           <a:p>
+            <a:pPr>
+              <a:lnSpc>
+                <a:spcPct val="100000"/>
+              </a:lnSpc>
+            </a:pPr>
             <a:endParaRPr b="0" lang="en-US" sz="1800" spc="-1" strike="noStrike">
               <a:solidFill>
                 <a:srgbClr val="000000"/>
@@ -9015,7 +8803,7 @@
         <p:spPr>
           <a:xfrm>
             <a:off x="658440" y="4718160"/>
-            <a:ext cx="10844280" cy="365400"/>
+            <a:ext cx="10843920" cy="365040"/>
           </a:xfrm>
           <a:prstGeom prst="rect">
             <a:avLst/>
@@ -9072,7 +8860,7 @@
         <p:spPr>
           <a:xfrm>
             <a:off x="658440" y="5102280"/>
-            <a:ext cx="10844280" cy="1060200"/>
+            <a:ext cx="10843920" cy="1059840"/>
           </a:xfrm>
           <a:prstGeom prst="rect">
             <a:avLst/>
@@ -9165,7 +8953,7 @@
         <p:spPr>
           <a:xfrm>
             <a:off x="11457360" y="6400800"/>
-            <a:ext cx="456840" cy="273960"/>
+            <a:ext cx="456480" cy="273600"/>
           </a:xfrm>
           <a:prstGeom prst="rect">
             <a:avLst/>
@@ -9259,7 +9047,7 @@
         <p:spPr>
           <a:xfrm>
             <a:off x="457200" y="292680"/>
-            <a:ext cx="7772040" cy="639720"/>
+            <a:ext cx="7771680" cy="639360"/>
           </a:xfrm>
           <a:prstGeom prst="rect">
             <a:avLst/>
@@ -9316,7 +9104,7 @@
         <p:spPr>
           <a:xfrm>
             <a:off x="8942760" y="292680"/>
-            <a:ext cx="310680" cy="310680"/>
+            <a:ext cx="310320" cy="310320"/>
           </a:xfrm>
           <a:prstGeom prst="ellipse">
             <a:avLst/>
@@ -9339,6 +9127,11 @@
             <a:noAutofit/>
           </a:bodyPr>
           <a:p>
+            <a:pPr>
+              <a:lnSpc>
+                <a:spcPct val="100000"/>
+              </a:lnSpc>
+            </a:pPr>
             <a:endParaRPr b="0" lang="en-US" sz="1800" spc="-1" strike="noStrike">
               <a:solidFill>
                 <a:srgbClr val="ffffff"/>
@@ -9357,7 +9150,7 @@
         <p:spPr>
           <a:xfrm>
             <a:off x="8942760" y="292680"/>
-            <a:ext cx="310680" cy="310680"/>
+            <a:ext cx="310320" cy="310320"/>
           </a:xfrm>
           <a:prstGeom prst="rect">
             <a:avLst/>
@@ -9414,7 +9207,7 @@
         <p:spPr>
           <a:xfrm>
             <a:off x="9345240" y="292680"/>
-            <a:ext cx="2742840" cy="310680"/>
+            <a:ext cx="2742480" cy="310320"/>
           </a:xfrm>
           <a:prstGeom prst="rect">
             <a:avLst/>
@@ -9481,7 +9274,7 @@
         <p:spPr>
           <a:xfrm>
             <a:off x="457200" y="1417320"/>
-            <a:ext cx="2011320" cy="712800"/>
+            <a:ext cx="2010960" cy="712440"/>
           </a:xfrm>
           <a:prstGeom prst="rect">
             <a:avLst/>
@@ -9507,6 +9300,11 @@
             <a:noAutofit/>
           </a:bodyPr>
           <a:p>
+            <a:pPr>
+              <a:lnSpc>
+                <a:spcPct val="100000"/>
+              </a:lnSpc>
+            </a:pPr>
             <a:endParaRPr b="0" lang="en-US" sz="1800" spc="-1" strike="noStrike">
               <a:solidFill>
                 <a:srgbClr val="ffffff"/>
@@ -9525,7 +9323,7 @@
         <p:spPr>
           <a:xfrm>
             <a:off x="594360" y="1417320"/>
-            <a:ext cx="1737000" cy="712800"/>
+            <a:ext cx="1736640" cy="712440"/>
           </a:xfrm>
           <a:prstGeom prst="rect">
             <a:avLst/>
@@ -9582,7 +9380,7 @@
         <p:spPr>
           <a:xfrm>
             <a:off x="2468880" y="1417320"/>
-            <a:ext cx="1828440" cy="712800"/>
+            <a:ext cx="1828080" cy="712440"/>
           </a:xfrm>
           <a:prstGeom prst="rect">
             <a:avLst/>
@@ -9608,6 +9406,11 @@
             <a:noAutofit/>
           </a:bodyPr>
           <a:p>
+            <a:pPr>
+              <a:lnSpc>
+                <a:spcPct val="100000"/>
+              </a:lnSpc>
+            </a:pPr>
             <a:endParaRPr b="0" lang="en-US" sz="1800" spc="-1" strike="noStrike">
               <a:solidFill>
                 <a:srgbClr val="ffffff"/>
@@ -9626,7 +9429,7 @@
         <p:spPr>
           <a:xfrm>
             <a:off x="2606040" y="1417320"/>
-            <a:ext cx="1554120" cy="712800"/>
+            <a:ext cx="1553760" cy="712440"/>
           </a:xfrm>
           <a:prstGeom prst="rect">
             <a:avLst/>
@@ -9683,7 +9486,7 @@
         <p:spPr>
           <a:xfrm>
             <a:off x="4297680" y="1417320"/>
-            <a:ext cx="2194200" cy="712800"/>
+            <a:ext cx="2193840" cy="712440"/>
           </a:xfrm>
           <a:prstGeom prst="rect">
             <a:avLst/>
@@ -9709,6 +9512,11 @@
             <a:noAutofit/>
           </a:bodyPr>
           <a:p>
+            <a:pPr>
+              <a:lnSpc>
+                <a:spcPct val="100000"/>
+              </a:lnSpc>
+            </a:pPr>
             <a:endParaRPr b="0" lang="en-US" sz="1800" spc="-1" strike="noStrike">
               <a:solidFill>
                 <a:srgbClr val="ffffff"/>
@@ -9727,7 +9535,7 @@
         <p:spPr>
           <a:xfrm>
             <a:off x="4434840" y="1417320"/>
-            <a:ext cx="1919880" cy="712800"/>
+            <a:ext cx="1919520" cy="712440"/>
           </a:xfrm>
           <a:prstGeom prst="rect">
             <a:avLst/>
@@ -9784,7 +9592,7 @@
         <p:spPr>
           <a:xfrm>
             <a:off x="6492240" y="1417320"/>
-            <a:ext cx="2468520" cy="712800"/>
+            <a:ext cx="2468160" cy="712440"/>
           </a:xfrm>
           <a:prstGeom prst="rect">
             <a:avLst/>
@@ -9810,6 +9618,11 @@
             <a:noAutofit/>
           </a:bodyPr>
           <a:p>
+            <a:pPr>
+              <a:lnSpc>
+                <a:spcPct val="100000"/>
+              </a:lnSpc>
+            </a:pPr>
             <a:endParaRPr b="0" lang="en-US" sz="1800" spc="-1" strike="noStrike">
               <a:solidFill>
                 <a:srgbClr val="ffffff"/>
@@ -9828,7 +9641,7 @@
         <p:spPr>
           <a:xfrm>
             <a:off x="6629400" y="1417320"/>
-            <a:ext cx="2194200" cy="712800"/>
+            <a:ext cx="2193840" cy="712440"/>
           </a:xfrm>
           <a:prstGeom prst="rect">
             <a:avLst/>
@@ -9885,7 +9698,7 @@
         <p:spPr>
           <a:xfrm>
             <a:off x="8961120" y="1417320"/>
-            <a:ext cx="2742840" cy="712800"/>
+            <a:ext cx="2742480" cy="712440"/>
           </a:xfrm>
           <a:prstGeom prst="rect">
             <a:avLst/>
@@ -9911,6 +9724,11 @@
             <a:noAutofit/>
           </a:bodyPr>
           <a:p>
+            <a:pPr>
+              <a:lnSpc>
+                <a:spcPct val="100000"/>
+              </a:lnSpc>
+            </a:pPr>
             <a:endParaRPr b="0" lang="en-US" sz="1800" spc="-1" strike="noStrike">
               <a:solidFill>
                 <a:srgbClr val="ffffff"/>
@@ -9929,7 +9747,7 @@
         <p:spPr>
           <a:xfrm>
             <a:off x="9098280" y="1417320"/>
-            <a:ext cx="2468520" cy="712800"/>
+            <a:ext cx="2468160" cy="712440"/>
           </a:xfrm>
           <a:prstGeom prst="rect">
             <a:avLst/>
@@ -9986,7 +9804,7 @@
         <p:spPr>
           <a:xfrm>
             <a:off x="457200" y="2130480"/>
-            <a:ext cx="2011320" cy="712800"/>
+            <a:ext cx="2010960" cy="712440"/>
           </a:xfrm>
           <a:prstGeom prst="rect">
             <a:avLst/>
@@ -10012,6 +9830,11 @@
             <a:noAutofit/>
           </a:bodyPr>
           <a:p>
+            <a:pPr>
+              <a:lnSpc>
+                <a:spcPct val="100000"/>
+              </a:lnSpc>
+            </a:pPr>
             <a:endParaRPr b="0" lang="en-US" sz="1800" spc="-1" strike="noStrike">
               <a:solidFill>
                 <a:srgbClr val="000000"/>
@@ -10030,7 +9853,7 @@
         <p:spPr>
           <a:xfrm>
             <a:off x="594360" y="2130480"/>
-            <a:ext cx="1737000" cy="712800"/>
+            <a:ext cx="1736640" cy="712440"/>
           </a:xfrm>
           <a:prstGeom prst="rect">
             <a:avLst/>
@@ -10087,7 +9910,7 @@
         <p:spPr>
           <a:xfrm>
             <a:off x="2468880" y="2130480"/>
-            <a:ext cx="1828440" cy="712800"/>
+            <a:ext cx="1828080" cy="712440"/>
           </a:xfrm>
           <a:prstGeom prst="rect">
             <a:avLst/>
@@ -10113,6 +9936,11 @@
             <a:noAutofit/>
           </a:bodyPr>
           <a:p>
+            <a:pPr>
+              <a:lnSpc>
+                <a:spcPct val="100000"/>
+              </a:lnSpc>
+            </a:pPr>
             <a:endParaRPr b="0" lang="en-US" sz="1800" spc="-1" strike="noStrike">
               <a:solidFill>
                 <a:srgbClr val="000000"/>
@@ -10131,7 +9959,7 @@
         <p:spPr>
           <a:xfrm>
             <a:off x="2606040" y="2130480"/>
-            <a:ext cx="1554120" cy="712800"/>
+            <a:ext cx="1553760" cy="712440"/>
           </a:xfrm>
           <a:prstGeom prst="rect">
             <a:avLst/>
@@ -10188,7 +10016,7 @@
         <p:spPr>
           <a:xfrm>
             <a:off x="4297680" y="2130480"/>
-            <a:ext cx="2194200" cy="712800"/>
+            <a:ext cx="2193840" cy="712440"/>
           </a:xfrm>
           <a:prstGeom prst="rect">
             <a:avLst/>
@@ -10214,6 +10042,11 @@
             <a:noAutofit/>
           </a:bodyPr>
           <a:p>
+            <a:pPr>
+              <a:lnSpc>
+                <a:spcPct val="100000"/>
+              </a:lnSpc>
+            </a:pPr>
             <a:endParaRPr b="0" lang="en-US" sz="1800" spc="-1" strike="noStrike">
               <a:solidFill>
                 <a:srgbClr val="000000"/>
@@ -10232,7 +10065,7 @@
         <p:spPr>
           <a:xfrm>
             <a:off x="4434840" y="2130480"/>
-            <a:ext cx="1919880" cy="712800"/>
+            <a:ext cx="1919520" cy="712440"/>
           </a:xfrm>
           <a:prstGeom prst="rect">
             <a:avLst/>
@@ -10289,7 +10122,7 @@
         <p:spPr>
           <a:xfrm>
             <a:off x="6492240" y="2130480"/>
-            <a:ext cx="2468520" cy="712800"/>
+            <a:ext cx="2468160" cy="712440"/>
           </a:xfrm>
           <a:prstGeom prst="rect">
             <a:avLst/>
@@ -10315,6 +10148,11 @@
             <a:noAutofit/>
           </a:bodyPr>
           <a:p>
+            <a:pPr>
+              <a:lnSpc>
+                <a:spcPct val="100000"/>
+              </a:lnSpc>
+            </a:pPr>
             <a:endParaRPr b="0" lang="en-US" sz="1800" spc="-1" strike="noStrike">
               <a:solidFill>
                 <a:srgbClr val="000000"/>
@@ -10333,7 +10171,7 @@
         <p:spPr>
           <a:xfrm>
             <a:off x="6629400" y="2130480"/>
-            <a:ext cx="2194200" cy="712800"/>
+            <a:ext cx="2193840" cy="712440"/>
           </a:xfrm>
           <a:prstGeom prst="rect">
             <a:avLst/>
@@ -10390,7 +10228,7 @@
         <p:spPr>
           <a:xfrm>
             <a:off x="8961120" y="2130480"/>
-            <a:ext cx="2742840" cy="712800"/>
+            <a:ext cx="2742480" cy="712440"/>
           </a:xfrm>
           <a:prstGeom prst="rect">
             <a:avLst/>
@@ -10416,6 +10254,11 @@
             <a:noAutofit/>
           </a:bodyPr>
           <a:p>
+            <a:pPr>
+              <a:lnSpc>
+                <a:spcPct val="100000"/>
+              </a:lnSpc>
+            </a:pPr>
             <a:endParaRPr b="0" lang="en-US" sz="1800" spc="-1" strike="noStrike">
               <a:solidFill>
                 <a:srgbClr val="000000"/>
@@ -10434,7 +10277,7 @@
         <p:spPr>
           <a:xfrm>
             <a:off x="9098280" y="2130480"/>
-            <a:ext cx="2468520" cy="712800"/>
+            <a:ext cx="2468160" cy="712440"/>
           </a:xfrm>
           <a:prstGeom prst="rect">
             <a:avLst/>
@@ -10491,7 +10334,7 @@
         <p:spPr>
           <a:xfrm>
             <a:off x="457200" y="2843640"/>
-            <a:ext cx="2011320" cy="712800"/>
+            <a:ext cx="2010960" cy="712440"/>
           </a:xfrm>
           <a:prstGeom prst="rect">
             <a:avLst/>
@@ -10517,6 +10360,11 @@
             <a:noAutofit/>
           </a:bodyPr>
           <a:p>
+            <a:pPr>
+              <a:lnSpc>
+                <a:spcPct val="100000"/>
+              </a:lnSpc>
+            </a:pPr>
             <a:endParaRPr b="0" lang="en-US" sz="1800" spc="-1" strike="noStrike">
               <a:solidFill>
                 <a:srgbClr val="000000"/>
@@ -10535,7 +10383,7 @@
         <p:spPr>
           <a:xfrm>
             <a:off x="594360" y="2843640"/>
-            <a:ext cx="1737000" cy="712800"/>
+            <a:ext cx="1736640" cy="712440"/>
           </a:xfrm>
           <a:prstGeom prst="rect">
             <a:avLst/>
@@ -10592,7 +10440,7 @@
         <p:spPr>
           <a:xfrm>
             <a:off x="2468880" y="2843640"/>
-            <a:ext cx="1828440" cy="712800"/>
+            <a:ext cx="1828080" cy="712440"/>
           </a:xfrm>
           <a:prstGeom prst="rect">
             <a:avLst/>
@@ -10618,6 +10466,11 @@
             <a:noAutofit/>
           </a:bodyPr>
           <a:p>
+            <a:pPr>
+              <a:lnSpc>
+                <a:spcPct val="100000"/>
+              </a:lnSpc>
+            </a:pPr>
             <a:endParaRPr b="0" lang="en-US" sz="1800" spc="-1" strike="noStrike">
               <a:solidFill>
                 <a:srgbClr val="000000"/>
@@ -10636,7 +10489,7 @@
         <p:spPr>
           <a:xfrm>
             <a:off x="2606040" y="2843640"/>
-            <a:ext cx="1554120" cy="712800"/>
+            <a:ext cx="1553760" cy="712440"/>
           </a:xfrm>
           <a:prstGeom prst="rect">
             <a:avLst/>
@@ -10693,7 +10546,7 @@
         <p:spPr>
           <a:xfrm>
             <a:off x="4297680" y="2843640"/>
-            <a:ext cx="2194200" cy="712800"/>
+            <a:ext cx="2193840" cy="712440"/>
           </a:xfrm>
           <a:prstGeom prst="rect">
             <a:avLst/>
@@ -10719,6 +10572,11 @@
             <a:noAutofit/>
           </a:bodyPr>
           <a:p>
+            <a:pPr>
+              <a:lnSpc>
+                <a:spcPct val="100000"/>
+              </a:lnSpc>
+            </a:pPr>
             <a:endParaRPr b="0" lang="en-US" sz="1800" spc="-1" strike="noStrike">
               <a:solidFill>
                 <a:srgbClr val="000000"/>
@@ -10737,7 +10595,7 @@
         <p:spPr>
           <a:xfrm>
             <a:off x="4434840" y="2843640"/>
-            <a:ext cx="1919880" cy="712800"/>
+            <a:ext cx="1919520" cy="712440"/>
           </a:xfrm>
           <a:prstGeom prst="rect">
             <a:avLst/>
@@ -10794,7 +10652,7 @@
         <p:spPr>
           <a:xfrm>
             <a:off x="6492240" y="2843640"/>
-            <a:ext cx="2468520" cy="712800"/>
+            <a:ext cx="2468160" cy="712440"/>
           </a:xfrm>
           <a:prstGeom prst="rect">
             <a:avLst/>
@@ -10820,6 +10678,11 @@
             <a:noAutofit/>
           </a:bodyPr>
           <a:p>
+            <a:pPr>
+              <a:lnSpc>
+                <a:spcPct val="100000"/>
+              </a:lnSpc>
+            </a:pPr>
             <a:endParaRPr b="0" lang="en-US" sz="1800" spc="-1" strike="noStrike">
               <a:solidFill>
                 <a:srgbClr val="000000"/>
@@ -10838,7 +10701,7 @@
         <p:spPr>
           <a:xfrm>
             <a:off x="6629400" y="2843640"/>
-            <a:ext cx="2194200" cy="712800"/>
+            <a:ext cx="2193840" cy="712440"/>
           </a:xfrm>
           <a:prstGeom prst="rect">
             <a:avLst/>
@@ -10895,7 +10758,7 @@
         <p:spPr>
           <a:xfrm>
             <a:off x="8961120" y="2843640"/>
-            <a:ext cx="2742840" cy="712800"/>
+            <a:ext cx="2742480" cy="712440"/>
           </a:xfrm>
           <a:prstGeom prst="rect">
             <a:avLst/>
@@ -10921,6 +10784,11 @@
             <a:noAutofit/>
           </a:bodyPr>
           <a:p>
+            <a:pPr>
+              <a:lnSpc>
+                <a:spcPct val="100000"/>
+              </a:lnSpc>
+            </a:pPr>
             <a:endParaRPr b="0" lang="en-US" sz="1800" spc="-1" strike="noStrike">
               <a:solidFill>
                 <a:srgbClr val="000000"/>
@@ -10939,7 +10807,7 @@
         <p:spPr>
           <a:xfrm>
             <a:off x="9098280" y="2843640"/>
-            <a:ext cx="2468520" cy="712800"/>
+            <a:ext cx="2468160" cy="712440"/>
           </a:xfrm>
           <a:prstGeom prst="rect">
             <a:avLst/>
@@ -10996,7 +10864,7 @@
         <p:spPr>
           <a:xfrm>
             <a:off x="457200" y="3557160"/>
-            <a:ext cx="2011320" cy="712800"/>
+            <a:ext cx="2010960" cy="712440"/>
           </a:xfrm>
           <a:prstGeom prst="rect">
             <a:avLst/>
@@ -11022,6 +10890,11 @@
             <a:noAutofit/>
           </a:bodyPr>
           <a:p>
+            <a:pPr>
+              <a:lnSpc>
+                <a:spcPct val="100000"/>
+              </a:lnSpc>
+            </a:pPr>
             <a:endParaRPr b="0" lang="en-US" sz="1800" spc="-1" strike="noStrike">
               <a:solidFill>
                 <a:srgbClr val="000000"/>
@@ -11040,7 +10913,7 @@
         <p:spPr>
           <a:xfrm>
             <a:off x="594360" y="3557160"/>
-            <a:ext cx="1737000" cy="712800"/>
+            <a:ext cx="1736640" cy="712440"/>
           </a:xfrm>
           <a:prstGeom prst="rect">
             <a:avLst/>
@@ -11097,7 +10970,7 @@
         <p:spPr>
           <a:xfrm>
             <a:off x="2468880" y="3557160"/>
-            <a:ext cx="1828440" cy="712800"/>
+            <a:ext cx="1828080" cy="712440"/>
           </a:xfrm>
           <a:prstGeom prst="rect">
             <a:avLst/>
@@ -11123,6 +10996,11 @@
             <a:noAutofit/>
           </a:bodyPr>
           <a:p>
+            <a:pPr>
+              <a:lnSpc>
+                <a:spcPct val="100000"/>
+              </a:lnSpc>
+            </a:pPr>
             <a:endParaRPr b="0" lang="en-US" sz="1800" spc="-1" strike="noStrike">
               <a:solidFill>
                 <a:srgbClr val="000000"/>
@@ -11141,7 +11019,7 @@
         <p:spPr>
           <a:xfrm>
             <a:off x="2606040" y="3557160"/>
-            <a:ext cx="1554120" cy="712800"/>
+            <a:ext cx="1553760" cy="712440"/>
           </a:xfrm>
           <a:prstGeom prst="rect">
             <a:avLst/>
@@ -11198,7 +11076,7 @@
         <p:spPr>
           <a:xfrm>
             <a:off x="4297680" y="3557160"/>
-            <a:ext cx="2194200" cy="712800"/>
+            <a:ext cx="2193840" cy="712440"/>
           </a:xfrm>
           <a:prstGeom prst="rect">
             <a:avLst/>
@@ -11224,6 +11102,11 @@
             <a:noAutofit/>
           </a:bodyPr>
           <a:p>
+            <a:pPr>
+              <a:lnSpc>
+                <a:spcPct val="100000"/>
+              </a:lnSpc>
+            </a:pPr>
             <a:endParaRPr b="0" lang="en-US" sz="1800" spc="-1" strike="noStrike">
               <a:solidFill>
                 <a:srgbClr val="000000"/>
@@ -11242,7 +11125,7 @@
         <p:spPr>
           <a:xfrm>
             <a:off x="4434840" y="3557160"/>
-            <a:ext cx="1919880" cy="712800"/>
+            <a:ext cx="1919520" cy="712440"/>
           </a:xfrm>
           <a:prstGeom prst="rect">
             <a:avLst/>
@@ -11299,7 +11182,7 @@
         <p:spPr>
           <a:xfrm>
             <a:off x="6492240" y="3557160"/>
-            <a:ext cx="2468520" cy="712800"/>
+            <a:ext cx="2468160" cy="712440"/>
           </a:xfrm>
           <a:prstGeom prst="rect">
             <a:avLst/>
@@ -11325,6 +11208,11 @@
             <a:noAutofit/>
           </a:bodyPr>
           <a:p>
+            <a:pPr>
+              <a:lnSpc>
+                <a:spcPct val="100000"/>
+              </a:lnSpc>
+            </a:pPr>
             <a:endParaRPr b="0" lang="en-US" sz="1800" spc="-1" strike="noStrike">
               <a:solidFill>
                 <a:srgbClr val="000000"/>
@@ -11343,7 +11231,7 @@
         <p:spPr>
           <a:xfrm>
             <a:off x="6629400" y="3557160"/>
-            <a:ext cx="2194200" cy="712800"/>
+            <a:ext cx="2193840" cy="712440"/>
           </a:xfrm>
           <a:prstGeom prst="rect">
             <a:avLst/>
@@ -11400,7 +11288,7 @@
         <p:spPr>
           <a:xfrm>
             <a:off x="8961120" y="3557160"/>
-            <a:ext cx="2742840" cy="712800"/>
+            <a:ext cx="2742480" cy="712440"/>
           </a:xfrm>
           <a:prstGeom prst="rect">
             <a:avLst/>
@@ -11426,6 +11314,11 @@
             <a:noAutofit/>
           </a:bodyPr>
           <a:p>
+            <a:pPr>
+              <a:lnSpc>
+                <a:spcPct val="100000"/>
+              </a:lnSpc>
+            </a:pPr>
             <a:endParaRPr b="0" lang="en-US" sz="1800" spc="-1" strike="noStrike">
               <a:solidFill>
                 <a:srgbClr val="000000"/>
@@ -11444,7 +11337,7 @@
         <p:spPr>
           <a:xfrm>
             <a:off x="9098280" y="3557160"/>
-            <a:ext cx="2468520" cy="712800"/>
+            <a:ext cx="2468160" cy="712440"/>
           </a:xfrm>
           <a:prstGeom prst="rect">
             <a:avLst/>
@@ -11501,7 +11394,7 @@
         <p:spPr>
           <a:xfrm>
             <a:off x="457200" y="4270320"/>
-            <a:ext cx="2011320" cy="712800"/>
+            <a:ext cx="2010960" cy="712440"/>
           </a:xfrm>
           <a:prstGeom prst="rect">
             <a:avLst/>
@@ -11527,6 +11420,11 @@
             <a:noAutofit/>
           </a:bodyPr>
           <a:p>
+            <a:pPr>
+              <a:lnSpc>
+                <a:spcPct val="100000"/>
+              </a:lnSpc>
+            </a:pPr>
             <a:endParaRPr b="0" lang="en-US" sz="1800" spc="-1" strike="noStrike">
               <a:solidFill>
                 <a:srgbClr val="000000"/>
@@ -11545,7 +11443,7 @@
         <p:spPr>
           <a:xfrm>
             <a:off x="594360" y="4270320"/>
-            <a:ext cx="1737000" cy="712800"/>
+            <a:ext cx="1736640" cy="712440"/>
           </a:xfrm>
           <a:prstGeom prst="rect">
             <a:avLst/>
@@ -11602,7 +11500,7 @@
         <p:spPr>
           <a:xfrm>
             <a:off x="2468880" y="4270320"/>
-            <a:ext cx="1828440" cy="712800"/>
+            <a:ext cx="1828080" cy="712440"/>
           </a:xfrm>
           <a:prstGeom prst="rect">
             <a:avLst/>
@@ -11628,6 +11526,11 @@
             <a:noAutofit/>
           </a:bodyPr>
           <a:p>
+            <a:pPr>
+              <a:lnSpc>
+                <a:spcPct val="100000"/>
+              </a:lnSpc>
+            </a:pPr>
             <a:endParaRPr b="0" lang="en-US" sz="1800" spc="-1" strike="noStrike">
               <a:solidFill>
                 <a:srgbClr val="000000"/>
@@ -11646,7 +11549,7 @@
         <p:spPr>
           <a:xfrm>
             <a:off x="2606040" y="4270320"/>
-            <a:ext cx="1554120" cy="712800"/>
+            <a:ext cx="1553760" cy="712440"/>
           </a:xfrm>
           <a:prstGeom prst="rect">
             <a:avLst/>
@@ -11703,7 +11606,7 @@
         <p:spPr>
           <a:xfrm>
             <a:off x="4297680" y="4270320"/>
-            <a:ext cx="2194200" cy="712800"/>
+            <a:ext cx="2193840" cy="712440"/>
           </a:xfrm>
           <a:prstGeom prst="rect">
             <a:avLst/>
@@ -11729,6 +11632,11 @@
             <a:noAutofit/>
           </a:bodyPr>
           <a:p>
+            <a:pPr>
+              <a:lnSpc>
+                <a:spcPct val="100000"/>
+              </a:lnSpc>
+            </a:pPr>
             <a:endParaRPr b="0" lang="en-US" sz="1800" spc="-1" strike="noStrike">
               <a:solidFill>
                 <a:srgbClr val="000000"/>
@@ -11747,7 +11655,7 @@
         <p:spPr>
           <a:xfrm>
             <a:off x="4434840" y="4270320"/>
-            <a:ext cx="1919880" cy="712800"/>
+            <a:ext cx="1919520" cy="712440"/>
           </a:xfrm>
           <a:prstGeom prst="rect">
             <a:avLst/>
@@ -11804,7 +11712,7 @@
         <p:spPr>
           <a:xfrm>
             <a:off x="6492240" y="4270320"/>
-            <a:ext cx="2468520" cy="712800"/>
+            <a:ext cx="2468160" cy="712440"/>
           </a:xfrm>
           <a:prstGeom prst="rect">
             <a:avLst/>
@@ -11830,6 +11738,11 @@
             <a:noAutofit/>
           </a:bodyPr>
           <a:p>
+            <a:pPr>
+              <a:lnSpc>
+                <a:spcPct val="100000"/>
+              </a:lnSpc>
+            </a:pPr>
             <a:endParaRPr b="0" lang="en-US" sz="1800" spc="-1" strike="noStrike">
               <a:solidFill>
                 <a:srgbClr val="000000"/>
@@ -11848,7 +11761,7 @@
         <p:spPr>
           <a:xfrm>
             <a:off x="6629400" y="4270320"/>
-            <a:ext cx="2194200" cy="712800"/>
+            <a:ext cx="2193840" cy="712440"/>
           </a:xfrm>
           <a:prstGeom prst="rect">
             <a:avLst/>
@@ -11905,7 +11818,7 @@
         <p:spPr>
           <a:xfrm>
             <a:off x="8961120" y="4270320"/>
-            <a:ext cx="2742840" cy="712800"/>
+            <a:ext cx="2742480" cy="712440"/>
           </a:xfrm>
           <a:prstGeom prst="rect">
             <a:avLst/>
@@ -11931,6 +11844,11 @@
             <a:noAutofit/>
           </a:bodyPr>
           <a:p>
+            <a:pPr>
+              <a:lnSpc>
+                <a:spcPct val="100000"/>
+              </a:lnSpc>
+            </a:pPr>
             <a:endParaRPr b="0" lang="en-US" sz="1800" spc="-1" strike="noStrike">
               <a:solidFill>
                 <a:srgbClr val="000000"/>
@@ -11949,7 +11867,7 @@
         <p:spPr>
           <a:xfrm>
             <a:off x="9098280" y="4270320"/>
-            <a:ext cx="2468520" cy="712800"/>
+            <a:ext cx="2468160" cy="712440"/>
           </a:xfrm>
           <a:prstGeom prst="rect">
             <a:avLst/>
@@ -12006,7 +11924,7 @@
         <p:spPr>
           <a:xfrm>
             <a:off x="457200" y="4983480"/>
-            <a:ext cx="2011320" cy="712800"/>
+            <a:ext cx="2010960" cy="712440"/>
           </a:xfrm>
           <a:prstGeom prst="rect">
             <a:avLst/>
@@ -12032,6 +11950,11 @@
             <a:noAutofit/>
           </a:bodyPr>
           <a:p>
+            <a:pPr>
+              <a:lnSpc>
+                <a:spcPct val="100000"/>
+              </a:lnSpc>
+            </a:pPr>
             <a:endParaRPr b="0" lang="en-US" sz="1800" spc="-1" strike="noStrike">
               <a:solidFill>
                 <a:srgbClr val="000000"/>
@@ -12050,7 +11973,7 @@
         <p:spPr>
           <a:xfrm>
             <a:off x="594360" y="4983480"/>
-            <a:ext cx="1737000" cy="712800"/>
+            <a:ext cx="1736640" cy="712440"/>
           </a:xfrm>
           <a:prstGeom prst="rect">
             <a:avLst/>
@@ -12107,7 +12030,7 @@
         <p:spPr>
           <a:xfrm>
             <a:off x="2468880" y="4983480"/>
-            <a:ext cx="1828440" cy="712800"/>
+            <a:ext cx="1828080" cy="712440"/>
           </a:xfrm>
           <a:prstGeom prst="rect">
             <a:avLst/>
@@ -12133,6 +12056,11 @@
             <a:noAutofit/>
           </a:bodyPr>
           <a:p>
+            <a:pPr>
+              <a:lnSpc>
+                <a:spcPct val="100000"/>
+              </a:lnSpc>
+            </a:pPr>
             <a:endParaRPr b="0" lang="en-US" sz="1800" spc="-1" strike="noStrike">
               <a:solidFill>
                 <a:srgbClr val="000000"/>
@@ -12151,7 +12079,7 @@
         <p:spPr>
           <a:xfrm>
             <a:off x="2606040" y="4983480"/>
-            <a:ext cx="1554120" cy="712800"/>
+            <a:ext cx="1553760" cy="712440"/>
           </a:xfrm>
           <a:prstGeom prst="rect">
             <a:avLst/>
@@ -12208,7 +12136,7 @@
         <p:spPr>
           <a:xfrm>
             <a:off x="4297680" y="4983480"/>
-            <a:ext cx="2194200" cy="712800"/>
+            <a:ext cx="2193840" cy="712440"/>
           </a:xfrm>
           <a:prstGeom prst="rect">
             <a:avLst/>
@@ -12234,6 +12162,11 @@
             <a:noAutofit/>
           </a:bodyPr>
           <a:p>
+            <a:pPr>
+              <a:lnSpc>
+                <a:spcPct val="100000"/>
+              </a:lnSpc>
+            </a:pPr>
             <a:endParaRPr b="0" lang="en-US" sz="1800" spc="-1" strike="noStrike">
               <a:solidFill>
                 <a:srgbClr val="000000"/>
@@ -12252,7 +12185,7 @@
         <p:spPr>
           <a:xfrm>
             <a:off x="4434840" y="4983480"/>
-            <a:ext cx="1919880" cy="712800"/>
+            <a:ext cx="1919520" cy="712440"/>
           </a:xfrm>
           <a:prstGeom prst="rect">
             <a:avLst/>
@@ -12309,7 +12242,7 @@
         <p:spPr>
           <a:xfrm>
             <a:off x="6492240" y="4983480"/>
-            <a:ext cx="2468520" cy="712800"/>
+            <a:ext cx="2468160" cy="712440"/>
           </a:xfrm>
           <a:prstGeom prst="rect">
             <a:avLst/>
@@ -12335,6 +12268,11 @@
             <a:noAutofit/>
           </a:bodyPr>
           <a:p>
+            <a:pPr>
+              <a:lnSpc>
+                <a:spcPct val="100000"/>
+              </a:lnSpc>
+            </a:pPr>
             <a:endParaRPr b="0" lang="en-US" sz="1800" spc="-1" strike="noStrike">
               <a:solidFill>
                 <a:srgbClr val="000000"/>
@@ -12353,7 +12291,7 @@
         <p:spPr>
           <a:xfrm>
             <a:off x="6629400" y="4983480"/>
-            <a:ext cx="2194200" cy="712800"/>
+            <a:ext cx="2193840" cy="712440"/>
           </a:xfrm>
           <a:prstGeom prst="rect">
             <a:avLst/>
@@ -12410,7 +12348,7 @@
         <p:spPr>
           <a:xfrm>
             <a:off x="8961120" y="4983480"/>
-            <a:ext cx="2742840" cy="712800"/>
+            <a:ext cx="2742480" cy="712440"/>
           </a:xfrm>
           <a:prstGeom prst="rect">
             <a:avLst/>
@@ -12436,6 +12374,11 @@
             <a:noAutofit/>
           </a:bodyPr>
           <a:p>
+            <a:pPr>
+              <a:lnSpc>
+                <a:spcPct val="100000"/>
+              </a:lnSpc>
+            </a:pPr>
             <a:endParaRPr b="0" lang="en-US" sz="1800" spc="-1" strike="noStrike">
               <a:solidFill>
                 <a:srgbClr val="000000"/>
@@ -12454,7 +12397,7 @@
         <p:spPr>
           <a:xfrm>
             <a:off x="9098280" y="4983480"/>
-            <a:ext cx="2468520" cy="712800"/>
+            <a:ext cx="2468160" cy="712440"/>
           </a:xfrm>
           <a:prstGeom prst="rect">
             <a:avLst/>
@@ -12511,7 +12454,7 @@
         <p:spPr>
           <a:xfrm>
             <a:off x="11457360" y="6400800"/>
-            <a:ext cx="456840" cy="273960"/>
+            <a:ext cx="456480" cy="273600"/>
           </a:xfrm>
           <a:prstGeom prst="rect">
             <a:avLst/>
@@ -12605,7 +12548,7 @@
         <p:spPr>
           <a:xfrm>
             <a:off x="640080" y="4892040"/>
-            <a:ext cx="10972440" cy="822600"/>
+            <a:ext cx="10972080" cy="822240"/>
           </a:xfrm>
           <a:prstGeom prst="rect">
             <a:avLst/>
@@ -12662,7 +12605,7 @@
         <p:spPr>
           <a:xfrm>
             <a:off x="640080" y="5623560"/>
-            <a:ext cx="10972440" cy="456840"/>
+            <a:ext cx="10972080" cy="456480"/>
           </a:xfrm>
           <a:prstGeom prst="rect">
             <a:avLst/>
@@ -12756,7 +12699,7 @@
         <p:spPr>
           <a:xfrm>
             <a:off x="7810560" y="1324080"/>
-            <a:ext cx="3619080" cy="5009760"/>
+            <a:ext cx="3618720" cy="5009400"/>
           </a:xfrm>
           <a:prstGeom prst="roundRect">
             <a:avLst>
@@ -12783,6 +12726,11 @@
             <a:noAutofit/>
           </a:bodyPr>
           <a:p>
+            <a:pPr>
+              <a:lnSpc>
+                <a:spcPct val="100000"/>
+              </a:lnSpc>
+            </a:pPr>
             <a:endParaRPr b="0" lang="en-US" sz="1800" spc="-1" strike="noStrike">
               <a:solidFill>
                 <a:srgbClr val="000000"/>
@@ -12801,7 +12749,7 @@
         <p:spPr>
           <a:xfrm>
             <a:off x="4295880" y="1752480"/>
-            <a:ext cx="380520" cy="323640"/>
+            <a:ext cx="380160" cy="323280"/>
           </a:xfrm>
           <a:prstGeom prst="rect">
             <a:avLst/>
@@ -12845,7 +12793,7 @@
         <p:spPr>
           <a:xfrm>
             <a:off x="4295880" y="2419200"/>
-            <a:ext cx="380520" cy="323640"/>
+            <a:ext cx="380160" cy="323280"/>
           </a:xfrm>
           <a:prstGeom prst="rect">
             <a:avLst/>
@@ -12889,7 +12837,7 @@
         <p:spPr>
           <a:xfrm>
             <a:off x="4295880" y="3314880"/>
-            <a:ext cx="380520" cy="323640"/>
+            <a:ext cx="380160" cy="323280"/>
           </a:xfrm>
           <a:prstGeom prst="rect">
             <a:avLst/>
@@ -12933,7 +12881,7 @@
         <p:spPr>
           <a:xfrm>
             <a:off x="1666800" y="1866960"/>
-            <a:ext cx="5143320" cy="590040"/>
+            <a:ext cx="5142960" cy="589680"/>
           </a:xfrm>
           <a:prstGeom prst="roundRect">
             <a:avLst>
@@ -12960,6 +12908,11 @@
             <a:noAutofit/>
           </a:bodyPr>
           <a:p>
+            <a:pPr>
+              <a:lnSpc>
+                <a:spcPct val="100000"/>
+              </a:lnSpc>
+            </a:pPr>
             <a:endParaRPr b="0" lang="en-US" sz="1800" spc="-1" strike="noStrike">
               <a:solidFill>
                 <a:srgbClr val="000000"/>
@@ -12978,7 +12931,7 @@
         <p:spPr>
           <a:xfrm>
             <a:off x="2000160" y="2009880"/>
-            <a:ext cx="4476240" cy="304560"/>
+            <a:ext cx="4475880" cy="304200"/>
           </a:xfrm>
           <a:prstGeom prst="rect">
             <a:avLst/>
@@ -13032,7 +12985,7 @@
         <p:spPr>
           <a:xfrm>
             <a:off x="990720" y="2943360"/>
-            <a:ext cx="399600" cy="209160"/>
+            <a:ext cx="399240" cy="208800"/>
           </a:xfrm>
           <a:prstGeom prst="rect">
             <a:avLst/>
@@ -13088,7 +13041,7 @@
         <p:spPr>
           <a:xfrm>
             <a:off x="1666800" y="2771640"/>
-            <a:ext cx="5143320" cy="590040"/>
+            <a:ext cx="5142960" cy="589680"/>
           </a:xfrm>
           <a:prstGeom prst="roundRect">
             <a:avLst>
@@ -13115,6 +13068,11 @@
             <a:noAutofit/>
           </a:bodyPr>
           <a:p>
+            <a:pPr>
+              <a:lnSpc>
+                <a:spcPct val="100000"/>
+              </a:lnSpc>
+            </a:pPr>
             <a:endParaRPr b="0" lang="en-US" sz="1800" spc="-1" strike="noStrike">
               <a:solidFill>
                 <a:srgbClr val="000000"/>
@@ -13133,7 +13091,7 @@
         <p:spPr>
           <a:xfrm>
             <a:off x="2000160" y="2914560"/>
-            <a:ext cx="4476240" cy="304560"/>
+            <a:ext cx="4475880" cy="304200"/>
           </a:xfrm>
           <a:prstGeom prst="rect">
             <a:avLst/>
@@ -13187,7 +13145,7 @@
         <p:spPr>
           <a:xfrm>
             <a:off x="1666800" y="3676680"/>
-            <a:ext cx="5143320" cy="590040"/>
+            <a:ext cx="5142960" cy="589680"/>
           </a:xfrm>
           <a:prstGeom prst="roundRect">
             <a:avLst>
@@ -13214,6 +13172,11 @@
             <a:noAutofit/>
           </a:bodyPr>
           <a:p>
+            <a:pPr>
+              <a:lnSpc>
+                <a:spcPct val="100000"/>
+              </a:lnSpc>
+            </a:pPr>
             <a:endParaRPr b="0" lang="en-US" sz="1800" spc="-1" strike="noStrike">
               <a:solidFill>
                 <a:srgbClr val="000000"/>
@@ -13232,7 +13195,7 @@
         <p:spPr>
           <a:xfrm>
             <a:off x="2000160" y="3819600"/>
-            <a:ext cx="4476240" cy="304560"/>
+            <a:ext cx="4475880" cy="304200"/>
           </a:xfrm>
           <a:prstGeom prst="rect">
             <a:avLst/>
@@ -13286,7 +13249,7 @@
         <p:spPr>
           <a:xfrm>
             <a:off x="990720" y="4753080"/>
-            <a:ext cx="399600" cy="209160"/>
+            <a:ext cx="399240" cy="208800"/>
           </a:xfrm>
           <a:prstGeom prst="rect">
             <a:avLst/>
@@ -13342,7 +13305,7 @@
         <p:spPr>
           <a:xfrm>
             <a:off x="1666800" y="4581360"/>
-            <a:ext cx="5143320" cy="590040"/>
+            <a:ext cx="5142960" cy="589680"/>
           </a:xfrm>
           <a:prstGeom prst="roundRect">
             <a:avLst>
@@ -13369,6 +13332,11 @@
             <a:noAutofit/>
           </a:bodyPr>
           <a:p>
+            <a:pPr>
+              <a:lnSpc>
+                <a:spcPct val="100000"/>
+              </a:lnSpc>
+            </a:pPr>
             <a:endParaRPr b="0" lang="en-US" sz="1800" spc="-1" strike="noStrike">
               <a:solidFill>
                 <a:srgbClr val="000000"/>
@@ -13387,7 +13355,7 @@
         <p:spPr>
           <a:xfrm>
             <a:off x="2000160" y="4724280"/>
-            <a:ext cx="4476240" cy="304560"/>
+            <a:ext cx="4475880" cy="304200"/>
           </a:xfrm>
           <a:prstGeom prst="rect">
             <a:avLst/>
@@ -13446,7 +13414,7 @@
         <p:spPr>
           <a:xfrm>
             <a:off x="8020080" y="1476360"/>
-            <a:ext cx="3161880" cy="4695480"/>
+            <a:ext cx="3161520" cy="4695120"/>
           </a:xfrm>
           <a:prstGeom prst="rect">
             <a:avLst/>
@@ -13465,7 +13433,7 @@
         <p:spPr>
           <a:xfrm>
             <a:off x="514440" y="304920"/>
-            <a:ext cx="6762240" cy="552240"/>
+            <a:ext cx="6761880" cy="551880"/>
           </a:xfrm>
           <a:prstGeom prst="rect">
             <a:avLst/>
@@ -13519,7 +13487,7 @@
         <p:spPr>
           <a:xfrm>
             <a:off x="514440" y="933480"/>
-            <a:ext cx="6571800" cy="285480"/>
+            <a:ext cx="6571440" cy="285120"/>
           </a:xfrm>
           <a:prstGeom prst="rect">
             <a:avLst/>
@@ -13575,7 +13543,7 @@
         <p:spPr>
           <a:xfrm>
             <a:off x="1666800" y="1495440"/>
-            <a:ext cx="2381040" cy="209160"/>
+            <a:ext cx="2380680" cy="208800"/>
           </a:xfrm>
           <a:prstGeom prst="rect">
             <a:avLst/>
@@ -13631,7 +13599,7 @@
         <p:spPr>
           <a:xfrm>
             <a:off x="8020080" y="6276960"/>
-            <a:ext cx="3161880" cy="209160"/>
+            <a:ext cx="3161520" cy="208800"/>
           </a:xfrm>
           <a:prstGeom prst="rect">
             <a:avLst/>
@@ -13724,7 +13692,7 @@
         <p:spPr>
           <a:xfrm>
             <a:off x="457200" y="292680"/>
-            <a:ext cx="7772040" cy="639720"/>
+            <a:ext cx="7771680" cy="639360"/>
           </a:xfrm>
           <a:prstGeom prst="rect">
             <a:avLst/>
@@ -13781,7 +13749,7 @@
         <p:spPr>
           <a:xfrm>
             <a:off x="8942760" y="292680"/>
-            <a:ext cx="310680" cy="310680"/>
+            <a:ext cx="310320" cy="310320"/>
           </a:xfrm>
           <a:prstGeom prst="ellipse">
             <a:avLst/>
@@ -13804,6 +13772,11 @@
             <a:noAutofit/>
           </a:bodyPr>
           <a:p>
+            <a:pPr>
+              <a:lnSpc>
+                <a:spcPct val="100000"/>
+              </a:lnSpc>
+            </a:pPr>
             <a:endParaRPr b="0" lang="en-US" sz="1800" spc="-1" strike="noStrike">
               <a:solidFill>
                 <a:srgbClr val="ffffff"/>
@@ -13822,7 +13795,7 @@
         <p:spPr>
           <a:xfrm>
             <a:off x="8942760" y="292680"/>
-            <a:ext cx="310680" cy="310680"/>
+            <a:ext cx="310320" cy="310320"/>
           </a:xfrm>
           <a:prstGeom prst="rect">
             <a:avLst/>
@@ -13879,7 +13852,7 @@
         <p:spPr>
           <a:xfrm>
             <a:off x="9345240" y="292680"/>
-            <a:ext cx="2742840" cy="310680"/>
+            <a:ext cx="2742480" cy="310320"/>
           </a:xfrm>
           <a:prstGeom prst="rect">
             <a:avLst/>
@@ -13946,7 +13919,7 @@
         <p:spPr>
           <a:xfrm>
             <a:off x="457200" y="1005840"/>
-            <a:ext cx="11246760" cy="456840"/>
+            <a:ext cx="11246400" cy="456480"/>
           </a:xfrm>
           <a:prstGeom prst="rect">
             <a:avLst/>
@@ -14003,7 +13976,7 @@
         <p:spPr>
           <a:xfrm>
             <a:off x="457200" y="1691640"/>
-            <a:ext cx="3520080" cy="1965600"/>
+            <a:ext cx="3519720" cy="1965240"/>
           </a:xfrm>
           <a:prstGeom prst="roundRect">
             <a:avLst>
@@ -14028,6 +14001,11 @@
             <a:noAutofit/>
           </a:bodyPr>
           <a:p>
+            <a:pPr>
+              <a:lnSpc>
+                <a:spcPct val="100000"/>
+              </a:lnSpc>
+            </a:pPr>
             <a:endParaRPr b="0" lang="en-US" sz="1800" spc="-1" strike="noStrike">
               <a:solidFill>
                 <a:srgbClr val="000000"/>
@@ -14046,7 +14024,7 @@
         <p:spPr>
           <a:xfrm>
             <a:off x="658440" y="1819800"/>
-            <a:ext cx="914040" cy="685440"/>
+            <a:ext cx="913680" cy="685080"/>
           </a:xfrm>
           <a:prstGeom prst="rect">
             <a:avLst/>
@@ -14103,7 +14081,7 @@
         <p:spPr>
           <a:xfrm>
             <a:off x="1508760" y="1874520"/>
-            <a:ext cx="2285640" cy="365400"/>
+            <a:ext cx="2285280" cy="365040"/>
           </a:xfrm>
           <a:prstGeom prst="rect">
             <a:avLst/>
@@ -14160,7 +14138,7 @@
         <p:spPr>
           <a:xfrm>
             <a:off x="658440" y="2606040"/>
-            <a:ext cx="3117600" cy="594000"/>
+            <a:ext cx="3117240" cy="593640"/>
           </a:xfrm>
           <a:prstGeom prst="rect">
             <a:avLst/>
@@ -14217,7 +14195,7 @@
         <p:spPr>
           <a:xfrm>
             <a:off x="4233600" y="1691640"/>
-            <a:ext cx="3520080" cy="1965600"/>
+            <a:ext cx="3519720" cy="1965240"/>
           </a:xfrm>
           <a:prstGeom prst="roundRect">
             <a:avLst>
@@ -14242,6 +14220,11 @@
             <a:noAutofit/>
           </a:bodyPr>
           <a:p>
+            <a:pPr>
+              <a:lnSpc>
+                <a:spcPct val="100000"/>
+              </a:lnSpc>
+            </a:pPr>
             <a:endParaRPr b="0" lang="en-US" sz="1800" spc="-1" strike="noStrike">
               <a:solidFill>
                 <a:srgbClr val="000000"/>
@@ -14260,7 +14243,7 @@
         <p:spPr>
           <a:xfrm>
             <a:off x="4434840" y="1819800"/>
-            <a:ext cx="914040" cy="685440"/>
+            <a:ext cx="913680" cy="685080"/>
           </a:xfrm>
           <a:prstGeom prst="rect">
             <a:avLst/>
@@ -14317,7 +14300,7 @@
         <p:spPr>
           <a:xfrm>
             <a:off x="5285160" y="1874520"/>
-            <a:ext cx="2285640" cy="365400"/>
+            <a:ext cx="2285280" cy="365040"/>
           </a:xfrm>
           <a:prstGeom prst="rect">
             <a:avLst/>
@@ -14374,7 +14357,7 @@
         <p:spPr>
           <a:xfrm>
             <a:off x="4434840" y="2606040"/>
-            <a:ext cx="3117600" cy="594000"/>
+            <a:ext cx="3117240" cy="593640"/>
           </a:xfrm>
           <a:prstGeom prst="rect">
             <a:avLst/>
@@ -14431,7 +14414,7 @@
         <p:spPr>
           <a:xfrm>
             <a:off x="8010000" y="1691640"/>
-            <a:ext cx="3520080" cy="1965600"/>
+            <a:ext cx="3519720" cy="1965240"/>
           </a:xfrm>
           <a:prstGeom prst="roundRect">
             <a:avLst>
@@ -14456,6 +14439,11 @@
             <a:noAutofit/>
           </a:bodyPr>
           <a:p>
+            <a:pPr>
+              <a:lnSpc>
+                <a:spcPct val="100000"/>
+              </a:lnSpc>
+            </a:pPr>
             <a:endParaRPr b="0" lang="en-US" sz="1800" spc="-1" strike="noStrike">
               <a:solidFill>
                 <a:srgbClr val="000000"/>
@@ -14474,7 +14462,7 @@
         <p:spPr>
           <a:xfrm>
             <a:off x="8211240" y="1819800"/>
-            <a:ext cx="914040" cy="685440"/>
+            <a:ext cx="913680" cy="685080"/>
           </a:xfrm>
           <a:prstGeom prst="rect">
             <a:avLst/>
@@ -14531,7 +14519,7 @@
         <p:spPr>
           <a:xfrm>
             <a:off x="9061560" y="1874520"/>
-            <a:ext cx="2285640" cy="365400"/>
+            <a:ext cx="2285280" cy="365040"/>
           </a:xfrm>
           <a:prstGeom prst="rect">
             <a:avLst/>
@@ -14588,7 +14576,7 @@
         <p:spPr>
           <a:xfrm>
             <a:off x="8211240" y="2606040"/>
-            <a:ext cx="3117600" cy="594000"/>
+            <a:ext cx="3117240" cy="593640"/>
           </a:xfrm>
           <a:prstGeom prst="rect">
             <a:avLst/>
@@ -14645,7 +14633,7 @@
         <p:spPr>
           <a:xfrm>
             <a:off x="457200" y="3950280"/>
-            <a:ext cx="3520080" cy="1965600"/>
+            <a:ext cx="3519720" cy="1965240"/>
           </a:xfrm>
           <a:prstGeom prst="roundRect">
             <a:avLst>
@@ -14670,6 +14658,11 @@
             <a:noAutofit/>
           </a:bodyPr>
           <a:p>
+            <a:pPr>
+              <a:lnSpc>
+                <a:spcPct val="100000"/>
+              </a:lnSpc>
+            </a:pPr>
             <a:endParaRPr b="0" lang="en-US" sz="1800" spc="-1" strike="noStrike">
               <a:solidFill>
                 <a:srgbClr val="000000"/>
@@ -14688,7 +14681,7 @@
         <p:spPr>
           <a:xfrm>
             <a:off x="658440" y="4078080"/>
-            <a:ext cx="914040" cy="685440"/>
+            <a:ext cx="913680" cy="685080"/>
           </a:xfrm>
           <a:prstGeom prst="rect">
             <a:avLst/>
@@ -14745,7 +14738,7 @@
         <p:spPr>
           <a:xfrm>
             <a:off x="1508760" y="4133160"/>
-            <a:ext cx="2285640" cy="365400"/>
+            <a:ext cx="2285280" cy="365040"/>
           </a:xfrm>
           <a:prstGeom prst="rect">
             <a:avLst/>
@@ -14802,7 +14795,7 @@
         <p:spPr>
           <a:xfrm>
             <a:off x="658440" y="4864680"/>
-            <a:ext cx="3117600" cy="594000"/>
+            <a:ext cx="3117240" cy="593640"/>
           </a:xfrm>
           <a:prstGeom prst="rect">
             <a:avLst/>
@@ -14859,7 +14852,7 @@
         <p:spPr>
           <a:xfrm>
             <a:off x="4233600" y="3950280"/>
-            <a:ext cx="3520080" cy="1965600"/>
+            <a:ext cx="3519720" cy="1965240"/>
           </a:xfrm>
           <a:prstGeom prst="roundRect">
             <a:avLst>
@@ -14884,6 +14877,11 @@
             <a:noAutofit/>
           </a:bodyPr>
           <a:p>
+            <a:pPr>
+              <a:lnSpc>
+                <a:spcPct val="100000"/>
+              </a:lnSpc>
+            </a:pPr>
             <a:endParaRPr b="0" lang="en-US" sz="1800" spc="-1" strike="noStrike">
               <a:solidFill>
                 <a:srgbClr val="000000"/>
@@ -14902,7 +14900,7 @@
         <p:spPr>
           <a:xfrm>
             <a:off x="4434840" y="4078080"/>
-            <a:ext cx="914040" cy="685440"/>
+            <a:ext cx="913680" cy="685080"/>
           </a:xfrm>
           <a:prstGeom prst="rect">
             <a:avLst/>
@@ -14959,7 +14957,7 @@
         <p:spPr>
           <a:xfrm>
             <a:off x="5285160" y="4133160"/>
-            <a:ext cx="2285640" cy="365400"/>
+            <a:ext cx="2285280" cy="365040"/>
           </a:xfrm>
           <a:prstGeom prst="rect">
             <a:avLst/>
@@ -15016,7 +15014,7 @@
         <p:spPr>
           <a:xfrm>
             <a:off x="4434840" y="4864680"/>
-            <a:ext cx="3117600" cy="594000"/>
+            <a:ext cx="3117240" cy="593640"/>
           </a:xfrm>
           <a:prstGeom prst="rect">
             <a:avLst/>
@@ -15073,7 +15071,7 @@
         <p:spPr>
           <a:xfrm>
             <a:off x="8010000" y="3950280"/>
-            <a:ext cx="3520080" cy="1965600"/>
+            <a:ext cx="3519720" cy="1965240"/>
           </a:xfrm>
           <a:prstGeom prst="roundRect">
             <a:avLst>
@@ -15098,6 +15096,11 @@
             <a:noAutofit/>
           </a:bodyPr>
           <a:p>
+            <a:pPr>
+              <a:lnSpc>
+                <a:spcPct val="100000"/>
+              </a:lnSpc>
+            </a:pPr>
             <a:endParaRPr b="0" lang="en-US" sz="1800" spc="-1" strike="noStrike">
               <a:solidFill>
                 <a:srgbClr val="000000"/>
@@ -15116,7 +15119,7 @@
         <p:spPr>
           <a:xfrm>
             <a:off x="8211240" y="4078080"/>
-            <a:ext cx="914040" cy="685440"/>
+            <a:ext cx="913680" cy="685080"/>
           </a:xfrm>
           <a:prstGeom prst="rect">
             <a:avLst/>
@@ -15173,7 +15176,7 @@
         <p:spPr>
           <a:xfrm>
             <a:off x="9061560" y="4133160"/>
-            <a:ext cx="2285640" cy="365400"/>
+            <a:ext cx="2285280" cy="365040"/>
           </a:xfrm>
           <a:prstGeom prst="rect">
             <a:avLst/>
@@ -15230,7 +15233,7 @@
         <p:spPr>
           <a:xfrm>
             <a:off x="8211240" y="4864680"/>
-            <a:ext cx="3117600" cy="594000"/>
+            <a:ext cx="3117240" cy="593640"/>
           </a:xfrm>
           <a:prstGeom prst="rect">
             <a:avLst/>
@@ -15287,7 +15290,7 @@
         <p:spPr>
           <a:xfrm>
             <a:off x="11457360" y="6400800"/>
-            <a:ext cx="456840" cy="273960"/>
+            <a:ext cx="456480" cy="273600"/>
           </a:xfrm>
           <a:prstGeom prst="rect">
             <a:avLst/>
@@ -15381,7 +15384,7 @@
         <p:spPr>
           <a:xfrm>
             <a:off x="457200" y="292680"/>
-            <a:ext cx="7772040" cy="639720"/>
+            <a:ext cx="7771680" cy="639360"/>
           </a:xfrm>
           <a:prstGeom prst="rect">
             <a:avLst/>
@@ -15438,7 +15441,7 @@
         <p:spPr>
           <a:xfrm>
             <a:off x="8942760" y="292680"/>
-            <a:ext cx="310680" cy="310680"/>
+            <a:ext cx="310320" cy="310320"/>
           </a:xfrm>
           <a:prstGeom prst="ellipse">
             <a:avLst/>
@@ -15461,6 +15464,11 @@
             <a:noAutofit/>
           </a:bodyPr>
           <a:p>
+            <a:pPr>
+              <a:lnSpc>
+                <a:spcPct val="100000"/>
+              </a:lnSpc>
+            </a:pPr>
             <a:endParaRPr b="0" lang="en-US" sz="1800" spc="-1" strike="noStrike">
               <a:solidFill>
                 <a:srgbClr val="ffffff"/>
@@ -15479,7 +15487,7 @@
         <p:spPr>
           <a:xfrm>
             <a:off x="8942760" y="292680"/>
-            <a:ext cx="310680" cy="310680"/>
+            <a:ext cx="310320" cy="310320"/>
           </a:xfrm>
           <a:prstGeom prst="rect">
             <a:avLst/>
@@ -15536,7 +15544,7 @@
         <p:spPr>
           <a:xfrm>
             <a:off x="9345240" y="292680"/>
-            <a:ext cx="2742840" cy="310680"/>
+            <a:ext cx="2742480" cy="310320"/>
           </a:xfrm>
           <a:prstGeom prst="rect">
             <a:avLst/>
@@ -15603,7 +15611,7 @@
         <p:spPr>
           <a:xfrm>
             <a:off x="457200" y="1417320"/>
-            <a:ext cx="2450160" cy="2880000"/>
+            <a:ext cx="2449800" cy="2879640"/>
           </a:xfrm>
           <a:prstGeom prst="roundRect">
             <a:avLst>
@@ -15628,6 +15636,11 @@
             <a:noAutofit/>
           </a:bodyPr>
           <a:p>
+            <a:pPr>
+              <a:lnSpc>
+                <a:spcPct val="100000"/>
+              </a:lnSpc>
+            </a:pPr>
             <a:endParaRPr b="0" lang="en-US" sz="1800" spc="-1" strike="noStrike">
               <a:solidFill>
                 <a:srgbClr val="000000"/>
@@ -15646,7 +15659,7 @@
         <p:spPr>
           <a:xfrm>
             <a:off x="658440" y="1563480"/>
-            <a:ext cx="2048040" cy="365400"/>
+            <a:ext cx="2047680" cy="365040"/>
           </a:xfrm>
           <a:prstGeom prst="rect">
             <a:avLst/>
@@ -15703,7 +15716,7 @@
         <p:spPr>
           <a:xfrm>
             <a:off x="658440" y="1947600"/>
-            <a:ext cx="2048040" cy="2203200"/>
+            <a:ext cx="2047680" cy="2202840"/>
           </a:xfrm>
           <a:prstGeom prst="rect">
             <a:avLst/>
@@ -15827,7 +15840,7 @@
         <p:spPr>
           <a:xfrm>
             <a:off x="3255120" y="1417320"/>
-            <a:ext cx="2450160" cy="2880000"/>
+            <a:ext cx="2449800" cy="2879640"/>
           </a:xfrm>
           <a:prstGeom prst="roundRect">
             <a:avLst>
@@ -15852,6 +15865,11 @@
             <a:noAutofit/>
           </a:bodyPr>
           <a:p>
+            <a:pPr>
+              <a:lnSpc>
+                <a:spcPct val="100000"/>
+              </a:lnSpc>
+            </a:pPr>
             <a:endParaRPr b="0" lang="en-US" sz="1800" spc="-1" strike="noStrike">
               <a:solidFill>
                 <a:srgbClr val="000000"/>
@@ -15870,7 +15888,7 @@
         <p:spPr>
           <a:xfrm>
             <a:off x="3456360" y="1563480"/>
-            <a:ext cx="2048040" cy="365400"/>
+            <a:ext cx="2047680" cy="365040"/>
           </a:xfrm>
           <a:prstGeom prst="rect">
             <a:avLst/>
@@ -15927,7 +15945,7 @@
         <p:spPr>
           <a:xfrm>
             <a:off x="3456360" y="1947600"/>
-            <a:ext cx="2048040" cy="2203200"/>
+            <a:ext cx="2047680" cy="2202840"/>
           </a:xfrm>
           <a:prstGeom prst="rect">
             <a:avLst/>
@@ -16051,7 +16069,7 @@
         <p:spPr>
           <a:xfrm>
             <a:off x="6053400" y="1417320"/>
-            <a:ext cx="2450160" cy="2880000"/>
+            <a:ext cx="2449800" cy="2879640"/>
           </a:xfrm>
           <a:prstGeom prst="roundRect">
             <a:avLst>
@@ -16076,6 +16094,11 @@
             <a:noAutofit/>
           </a:bodyPr>
           <a:p>
+            <a:pPr>
+              <a:lnSpc>
+                <a:spcPct val="100000"/>
+              </a:lnSpc>
+            </a:pPr>
             <a:endParaRPr b="0" lang="en-US" sz="1800" spc="-1" strike="noStrike">
               <a:solidFill>
                 <a:srgbClr val="000000"/>
@@ -16094,7 +16117,7 @@
         <p:spPr>
           <a:xfrm>
             <a:off x="6254640" y="1563480"/>
-            <a:ext cx="2048040" cy="365400"/>
+            <a:ext cx="2047680" cy="365040"/>
           </a:xfrm>
           <a:prstGeom prst="rect">
             <a:avLst/>
@@ -16151,7 +16174,7 @@
         <p:spPr>
           <a:xfrm>
             <a:off x="6254640" y="1947600"/>
-            <a:ext cx="2048040" cy="2203200"/>
+            <a:ext cx="2047680" cy="2202840"/>
           </a:xfrm>
           <a:prstGeom prst="rect">
             <a:avLst/>
@@ -16244,7 +16267,7 @@
         <p:spPr>
           <a:xfrm>
             <a:off x="8851320" y="1417320"/>
-            <a:ext cx="2450160" cy="2880000"/>
+            <a:ext cx="2449800" cy="2879640"/>
           </a:xfrm>
           <a:prstGeom prst="roundRect">
             <a:avLst>
@@ -16269,6 +16292,11 @@
             <a:noAutofit/>
           </a:bodyPr>
           <a:p>
+            <a:pPr>
+              <a:lnSpc>
+                <a:spcPct val="100000"/>
+              </a:lnSpc>
+            </a:pPr>
             <a:endParaRPr b="0" lang="en-US" sz="1800" spc="-1" strike="noStrike">
               <a:solidFill>
                 <a:srgbClr val="000000"/>
@@ -16287,7 +16315,7 @@
         <p:spPr>
           <a:xfrm>
             <a:off x="9052560" y="1563480"/>
-            <a:ext cx="2048040" cy="365400"/>
+            <a:ext cx="2047680" cy="365040"/>
           </a:xfrm>
           <a:prstGeom prst="rect">
             <a:avLst/>
@@ -16344,7 +16372,7 @@
         <p:spPr>
           <a:xfrm>
             <a:off x="9052560" y="1947600"/>
-            <a:ext cx="2048040" cy="2203200"/>
+            <a:ext cx="2047680" cy="2202840"/>
           </a:xfrm>
           <a:prstGeom prst="rect">
             <a:avLst/>
@@ -16677,7 +16705,7 @@
         <p:spPr>
           <a:xfrm>
             <a:off x="1682640" y="4690800"/>
-            <a:ext cx="8393760" cy="273960"/>
+            <a:ext cx="8393400" cy="273600"/>
           </a:xfrm>
           <a:prstGeom prst="rect">
             <a:avLst/>
@@ -16734,7 +16762,7 @@
         <p:spPr>
           <a:xfrm>
             <a:off x="11457360" y="6400800"/>
-            <a:ext cx="456840" cy="273960"/>
+            <a:ext cx="456480" cy="273600"/>
           </a:xfrm>
           <a:prstGeom prst="rect">
             <a:avLst/>
@@ -16792,19 +16820,18 @@
         </p:nvCxnSpPr>
         <p:spPr>
           <a:xfrm rot="5400000">
-            <a:off x="5139720" y="650520"/>
-            <a:ext cx="1289880" cy="8583840"/>
+            <a:off x="5139000" y="650520"/>
+            <a:ext cx="1290600" cy="8583840"/>
           </a:xfrm>
           <a:prstGeom prst="bentConnector3">
             <a:avLst>
               <a:gd name="adj1" fmla="val 100000"/>
             </a:avLst>
           </a:prstGeom>
-          <a:ln>
+          <a:ln w="0">
             <a:solidFill>
               <a:srgbClr val="4472c4"/>
             </a:solidFill>
-            <a:round/>
             <a:tailEnd len="med" type="triangle" w="med"/>
           </a:ln>
         </p:spPr>
@@ -16818,16 +16845,15 @@
         <p:spPr>
           <a:xfrm flipV="1">
             <a:off x="1492920" y="4297680"/>
-            <a:ext cx="360" cy="1289520"/>
+            <a:ext cx="720" cy="1289880"/>
           </a:xfrm>
           <a:prstGeom prst="straightConnector1">
             <a:avLst/>
           </a:prstGeom>
-          <a:ln>
+          <a:ln w="0">
             <a:solidFill>
               <a:srgbClr val="4472c4"/>
             </a:solidFill>
-            <a:round/>
             <a:tailEnd len="med" type="triangle" w="med"/>
           </a:ln>
         </p:spPr>
@@ -16878,7 +16904,7 @@
         <p:spPr>
           <a:xfrm>
             <a:off x="457200" y="292680"/>
-            <a:ext cx="7772040" cy="639720"/>
+            <a:ext cx="7771680" cy="639360"/>
           </a:xfrm>
           <a:prstGeom prst="rect">
             <a:avLst/>
@@ -16932,7 +16958,7 @@
         <p:spPr>
           <a:xfrm>
             <a:off x="8942760" y="292680"/>
-            <a:ext cx="310680" cy="310680"/>
+            <a:ext cx="310320" cy="310320"/>
           </a:xfrm>
           <a:prstGeom prst="ellipse">
             <a:avLst/>
@@ -16958,6 +16984,11 @@
             <a:noAutofit/>
           </a:bodyPr>
           <a:p>
+            <a:pPr>
+              <a:lnSpc>
+                <a:spcPct val="100000"/>
+              </a:lnSpc>
+            </a:pPr>
             <a:endParaRPr b="0" lang="en-US" sz="1800" spc="-1" strike="noStrike">
               <a:solidFill>
                 <a:srgbClr val="ffffff"/>
@@ -16976,7 +17007,7 @@
         <p:spPr>
           <a:xfrm>
             <a:off x="8942760" y="292680"/>
-            <a:ext cx="310680" cy="310680"/>
+            <a:ext cx="310320" cy="310320"/>
           </a:xfrm>
           <a:prstGeom prst="rect">
             <a:avLst/>
@@ -17030,7 +17061,7 @@
         <p:spPr>
           <a:xfrm>
             <a:off x="9345240" y="292680"/>
-            <a:ext cx="2742840" cy="310680"/>
+            <a:ext cx="2742480" cy="310320"/>
           </a:xfrm>
           <a:prstGeom prst="rect">
             <a:avLst/>
@@ -17084,7 +17115,7 @@
         <p:spPr>
           <a:xfrm>
             <a:off x="4924440" y="1390680"/>
-            <a:ext cx="2342880" cy="590040"/>
+            <a:ext cx="2342520" cy="589680"/>
           </a:xfrm>
           <a:prstGeom prst="rect">
             <a:avLst/>
@@ -17143,7 +17174,7 @@
         <p:spPr>
           <a:xfrm>
             <a:off x="2266920" y="2895480"/>
-            <a:ext cx="2018880" cy="1752120"/>
+            <a:ext cx="2018520" cy="1751760"/>
           </a:xfrm>
           <a:prstGeom prst="rect">
             <a:avLst/>
@@ -17202,7 +17233,7 @@
         <p:spPr>
           <a:xfrm>
             <a:off x="2438280" y="3457440"/>
-            <a:ext cx="1676160" cy="980640"/>
+            <a:ext cx="1675800" cy="980280"/>
           </a:xfrm>
           <a:prstGeom prst="rect">
             <a:avLst/>
@@ -17302,7 +17333,7 @@
         <p:spPr>
           <a:xfrm>
             <a:off x="4857840" y="2895480"/>
-            <a:ext cx="2247480" cy="1752120"/>
+            <a:ext cx="2247120" cy="1751760"/>
           </a:xfrm>
           <a:prstGeom prst="rect">
             <a:avLst/>
@@ -17361,7 +17392,7 @@
         <p:spPr>
           <a:xfrm>
             <a:off x="5029200" y="3457440"/>
-            <a:ext cx="1904760" cy="980640"/>
+            <a:ext cx="1904400" cy="980280"/>
           </a:xfrm>
           <a:prstGeom prst="rect">
             <a:avLst/>
@@ -17484,7 +17515,7 @@
         <p:spPr>
           <a:xfrm>
             <a:off x="7829640" y="2895480"/>
-            <a:ext cx="2018880" cy="1752120"/>
+            <a:ext cx="2018520" cy="1751760"/>
           </a:xfrm>
           <a:prstGeom prst="rect">
             <a:avLst/>
@@ -17543,7 +17574,7 @@
         <p:spPr>
           <a:xfrm>
             <a:off x="8001000" y="3457440"/>
-            <a:ext cx="1676160" cy="980640"/>
+            <a:ext cx="1675800" cy="980280"/>
           </a:xfrm>
           <a:prstGeom prst="rect">
             <a:avLst/>
@@ -17825,7 +17856,7 @@
         <p:spPr>
           <a:xfrm>
             <a:off x="11457360" y="6400800"/>
-            <a:ext cx="456840" cy="273960"/>
+            <a:ext cx="456480" cy="273600"/>
           </a:xfrm>
           <a:prstGeom prst="rect">
             <a:avLst/>
@@ -17916,7 +17947,7 @@
         <p:spPr>
           <a:xfrm>
             <a:off x="457200" y="292680"/>
-            <a:ext cx="8762760" cy="639720"/>
+            <a:ext cx="8762400" cy="639360"/>
           </a:xfrm>
           <a:prstGeom prst="rect">
             <a:avLst/>
@@ -17970,7 +18001,7 @@
         <p:spPr>
           <a:xfrm>
             <a:off x="457200" y="971640"/>
-            <a:ext cx="8572320" cy="323640"/>
+            <a:ext cx="8571960" cy="323280"/>
           </a:xfrm>
           <a:prstGeom prst="rect">
             <a:avLst/>
@@ -18024,7 +18055,7 @@
         <p:spPr>
           <a:xfrm>
             <a:off x="523800" y="1504800"/>
-            <a:ext cx="3904920" cy="4619160"/>
+            <a:ext cx="3904560" cy="4618800"/>
           </a:xfrm>
           <a:prstGeom prst="roundRect">
             <a:avLst>
@@ -18051,6 +18082,11 @@
             <a:noAutofit/>
           </a:bodyPr>
           <a:p>
+            <a:pPr>
+              <a:lnSpc>
+                <a:spcPct val="100000"/>
+              </a:lnSpc>
+            </a:pPr>
             <a:endParaRPr b="0" lang="en-US" sz="1800" spc="-1" strike="noStrike">
               <a:solidFill>
                 <a:srgbClr val="000000"/>
@@ -18069,7 +18105,7 @@
         <p:spPr>
           <a:xfrm>
             <a:off x="4952880" y="1523880"/>
-            <a:ext cx="6381360" cy="914040"/>
+            <a:ext cx="6381000" cy="913680"/>
           </a:xfrm>
           <a:prstGeom prst="roundRect">
             <a:avLst>
@@ -18097,6 +18133,11 @@
             <a:noAutofit/>
           </a:bodyPr>
           <a:p>
+            <a:pPr>
+              <a:lnSpc>
+                <a:spcPct val="100000"/>
+              </a:lnSpc>
+            </a:pPr>
             <a:endParaRPr b="0" lang="en-US" sz="1800" spc="-1" strike="noStrike">
               <a:solidFill>
                 <a:srgbClr val="000000"/>
@@ -18115,7 +18156,7 @@
         <p:spPr>
           <a:xfrm>
             <a:off x="5219640" y="1666800"/>
-            <a:ext cx="5810040" cy="256680"/>
+            <a:ext cx="5809680" cy="256320"/>
           </a:xfrm>
           <a:prstGeom prst="rect">
             <a:avLst/>
@@ -18169,7 +18210,7 @@
         <p:spPr>
           <a:xfrm>
             <a:off x="5219640" y="1971720"/>
-            <a:ext cx="5810040" cy="313920"/>
+            <a:ext cx="5809680" cy="313560"/>
           </a:xfrm>
           <a:prstGeom prst="rect">
             <a:avLst/>
@@ -18223,7 +18264,7 @@
         <p:spPr>
           <a:xfrm>
             <a:off x="4952880" y="2666880"/>
-            <a:ext cx="6381360" cy="914040"/>
+            <a:ext cx="6381000" cy="913680"/>
           </a:xfrm>
           <a:prstGeom prst="roundRect">
             <a:avLst>
@@ -18251,6 +18292,11 @@
             <a:noAutofit/>
           </a:bodyPr>
           <a:p>
+            <a:pPr>
+              <a:lnSpc>
+                <a:spcPct val="100000"/>
+              </a:lnSpc>
+            </a:pPr>
             <a:endParaRPr b="0" lang="en-US" sz="1800" spc="-1" strike="noStrike">
               <a:solidFill>
                 <a:srgbClr val="000000"/>
@@ -18269,7 +18315,7 @@
         <p:spPr>
           <a:xfrm>
             <a:off x="5219640" y="2809800"/>
-            <a:ext cx="5810040" cy="256680"/>
+            <a:ext cx="5809680" cy="256320"/>
           </a:xfrm>
           <a:prstGeom prst="rect">
             <a:avLst/>
@@ -18323,7 +18369,7 @@
         <p:spPr>
           <a:xfrm>
             <a:off x="5219640" y="3114720"/>
-            <a:ext cx="5810040" cy="313920"/>
+            <a:ext cx="5809680" cy="313560"/>
           </a:xfrm>
           <a:prstGeom prst="rect">
             <a:avLst/>
@@ -18377,7 +18423,7 @@
         <p:spPr>
           <a:xfrm>
             <a:off x="4952880" y="3809880"/>
-            <a:ext cx="6381360" cy="914040"/>
+            <a:ext cx="6381000" cy="913680"/>
           </a:xfrm>
           <a:prstGeom prst="roundRect">
             <a:avLst>
@@ -18405,6 +18451,11 @@
             <a:noAutofit/>
           </a:bodyPr>
           <a:p>
+            <a:pPr>
+              <a:lnSpc>
+                <a:spcPct val="100000"/>
+              </a:lnSpc>
+            </a:pPr>
             <a:endParaRPr b="0" lang="en-US" sz="1800" spc="-1" strike="noStrike">
               <a:solidFill>
                 <a:srgbClr val="000000"/>
@@ -18423,7 +18474,7 @@
         <p:spPr>
           <a:xfrm>
             <a:off x="5219640" y="3952800"/>
-            <a:ext cx="5810040" cy="256680"/>
+            <a:ext cx="5809680" cy="256320"/>
           </a:xfrm>
           <a:prstGeom prst="rect">
             <a:avLst/>
@@ -18477,7 +18528,7 @@
         <p:spPr>
           <a:xfrm>
             <a:off x="5219640" y="4257720"/>
-            <a:ext cx="5810040" cy="313920"/>
+            <a:ext cx="5809680" cy="313560"/>
           </a:xfrm>
           <a:prstGeom prst="rect">
             <a:avLst/>
@@ -18531,7 +18582,7 @@
         <p:spPr>
           <a:xfrm>
             <a:off x="4952880" y="4952880"/>
-            <a:ext cx="6381360" cy="914040"/>
+            <a:ext cx="6381000" cy="913680"/>
           </a:xfrm>
           <a:prstGeom prst="roundRect">
             <a:avLst>
@@ -18559,6 +18610,11 @@
             <a:noAutofit/>
           </a:bodyPr>
           <a:p>
+            <a:pPr>
+              <a:lnSpc>
+                <a:spcPct val="100000"/>
+              </a:lnSpc>
+            </a:pPr>
             <a:endParaRPr b="0" lang="en-US" sz="1800" spc="-1" strike="noStrike">
               <a:solidFill>
                 <a:srgbClr val="000000"/>
@@ -18577,7 +18633,7 @@
         <p:spPr>
           <a:xfrm>
             <a:off x="5219640" y="5095800"/>
-            <a:ext cx="5810040" cy="256680"/>
+            <a:ext cx="5809680" cy="256320"/>
           </a:xfrm>
           <a:prstGeom prst="rect">
             <a:avLst/>
@@ -18631,7 +18687,7 @@
         <p:spPr>
           <a:xfrm>
             <a:off x="5219640" y="5400720"/>
-            <a:ext cx="5810040" cy="313920"/>
+            <a:ext cx="5809680" cy="313560"/>
           </a:xfrm>
           <a:prstGeom prst="rect">
             <a:avLst/>
@@ -18722,7 +18778,7 @@
         <p:spPr>
           <a:xfrm>
             <a:off x="457200" y="292680"/>
-            <a:ext cx="10667520" cy="639720"/>
+            <a:ext cx="10667160" cy="639360"/>
           </a:xfrm>
           <a:prstGeom prst="rect">
             <a:avLst/>
@@ -18776,7 +18832,7 @@
         <p:spPr>
           <a:xfrm>
             <a:off x="457200" y="961920"/>
-            <a:ext cx="10572480" cy="285480"/>
+            <a:ext cx="10572120" cy="285120"/>
           </a:xfrm>
           <a:prstGeom prst="rect">
             <a:avLst/>
@@ -18830,7 +18886,7 @@
         <p:spPr>
           <a:xfrm>
             <a:off x="457200" y="1495440"/>
-            <a:ext cx="4285800" cy="285480"/>
+            <a:ext cx="4285440" cy="285120"/>
           </a:xfrm>
           <a:prstGeom prst="rect">
             <a:avLst/>
@@ -18929,7 +18985,7 @@
         <p:spPr>
           <a:xfrm>
             <a:off x="533520" y="2378880"/>
-            <a:ext cx="2142720" cy="1852200"/>
+            <a:ext cx="2142360" cy="1851840"/>
           </a:xfrm>
           <a:prstGeom prst="rect">
             <a:avLst/>
@@ -18948,7 +19004,7 @@
         <p:spPr>
           <a:xfrm>
             <a:off x="2952720" y="2057400"/>
-            <a:ext cx="2266560" cy="266400"/>
+            <a:ext cx="2266200" cy="266040"/>
           </a:xfrm>
           <a:prstGeom prst="rect">
             <a:avLst/>
@@ -19002,7 +19058,7 @@
         <p:spPr>
           <a:xfrm>
             <a:off x="2952720" y="2362320"/>
-            <a:ext cx="2381040" cy="609120"/>
+            <a:ext cx="2380680" cy="608760"/>
           </a:xfrm>
           <a:prstGeom prst="rect">
             <a:avLst/>
@@ -19079,7 +19135,7 @@
         <p:spPr>
           <a:xfrm>
             <a:off x="2952720" y="3200400"/>
-            <a:ext cx="2457000" cy="266400"/>
+            <a:ext cx="2456640" cy="266040"/>
           </a:xfrm>
           <a:prstGeom prst="rect">
             <a:avLst/>
@@ -19133,7 +19189,7 @@
         <p:spPr>
           <a:xfrm>
             <a:off x="2952720" y="3514680"/>
-            <a:ext cx="2428560" cy="618840"/>
+            <a:ext cx="2428200" cy="618480"/>
           </a:xfrm>
           <a:prstGeom prst="rect">
             <a:avLst/>
@@ -19187,7 +19243,7 @@
         <p:spPr>
           <a:xfrm>
             <a:off x="2952720" y="4381560"/>
-            <a:ext cx="2095200" cy="266400"/>
+            <a:ext cx="2094840" cy="266040"/>
           </a:xfrm>
           <a:prstGeom prst="rect">
             <a:avLst/>
@@ -19241,7 +19297,7 @@
         <p:spPr>
           <a:xfrm>
             <a:off x="2952720" y="4695840"/>
-            <a:ext cx="2428560" cy="657000"/>
+            <a:ext cx="2428200" cy="656640"/>
           </a:xfrm>
           <a:prstGeom prst="rect">
             <a:avLst/>
@@ -19295,7 +19351,7 @@
         <p:spPr>
           <a:xfrm>
             <a:off x="6172200" y="1495440"/>
-            <a:ext cx="4285800" cy="285480"/>
+            <a:ext cx="4285440" cy="285120"/>
           </a:xfrm>
           <a:prstGeom prst="rect">
             <a:avLst/>
@@ -19394,7 +19450,7 @@
         <p:spPr>
           <a:xfrm>
             <a:off x="6200640" y="2018880"/>
-            <a:ext cx="1571400" cy="1267200"/>
+            <a:ext cx="1571040" cy="1266840"/>
           </a:xfrm>
           <a:prstGeom prst="rect">
             <a:avLst/>
@@ -19413,7 +19469,7 @@
         <p:spPr>
           <a:xfrm>
             <a:off x="8058240" y="2076480"/>
-            <a:ext cx="2904840" cy="266400"/>
+            <a:ext cx="2904480" cy="266040"/>
           </a:xfrm>
           <a:prstGeom prst="rect">
             <a:avLst/>
@@ -19467,7 +19523,7 @@
         <p:spPr>
           <a:xfrm>
             <a:off x="8058240" y="2381400"/>
-            <a:ext cx="3066840" cy="466200"/>
+            <a:ext cx="3066480" cy="465840"/>
           </a:xfrm>
           <a:prstGeom prst="rect">
             <a:avLst/>
@@ -19525,7 +19581,7 @@
         <p:spPr>
           <a:xfrm>
             <a:off x="6222960" y="3352680"/>
-            <a:ext cx="1527120" cy="1380600"/>
+            <a:ext cx="1526760" cy="1380240"/>
           </a:xfrm>
           <a:prstGeom prst="rect">
             <a:avLst/>
@@ -19544,7 +19600,7 @@
         <p:spPr>
           <a:xfrm>
             <a:off x="8058240" y="3448080"/>
-            <a:ext cx="3047760" cy="266400"/>
+            <a:ext cx="3047400" cy="266040"/>
           </a:xfrm>
           <a:prstGeom prst="rect">
             <a:avLst/>
@@ -19598,7 +19654,7 @@
         <p:spPr>
           <a:xfrm>
             <a:off x="8058240" y="3762360"/>
-            <a:ext cx="3066840" cy="609120"/>
+            <a:ext cx="3066480" cy="608760"/>
           </a:xfrm>
           <a:prstGeom prst="rect">
             <a:avLst/>
@@ -19652,7 +19708,7 @@
         <p:spPr>
           <a:xfrm>
             <a:off x="6191280" y="5038560"/>
-            <a:ext cx="2952360" cy="266400"/>
+            <a:ext cx="2952000" cy="266040"/>
           </a:xfrm>
           <a:prstGeom prst="rect">
             <a:avLst/>
@@ -19706,7 +19762,7 @@
         <p:spPr>
           <a:xfrm>
             <a:off x="6191280" y="5353200"/>
-            <a:ext cx="4809600" cy="447480"/>
+            <a:ext cx="4809240" cy="447120"/>
           </a:xfrm>
           <a:prstGeom prst="rect">
             <a:avLst/>
@@ -19760,7 +19816,7 @@
         <p:spPr>
           <a:xfrm>
             <a:off x="457200" y="6000840"/>
-            <a:ext cx="10858320" cy="437760"/>
+            <a:ext cx="10857960" cy="437400"/>
           </a:xfrm>
           <a:prstGeom prst="roundRect">
             <a:avLst>
@@ -19788,6 +19844,11 @@
             <a:noAutofit/>
           </a:bodyPr>
           <a:p>
+            <a:pPr>
+              <a:lnSpc>
+                <a:spcPct val="100000"/>
+              </a:lnSpc>
+            </a:pPr>
             <a:endParaRPr b="0" lang="en-US" sz="1800" spc="-1" strike="noStrike">
               <a:solidFill>
                 <a:srgbClr val="000000"/>
@@ -19806,7 +19867,7 @@
         <p:spPr>
           <a:xfrm>
             <a:off x="704880" y="6105600"/>
-            <a:ext cx="2095200" cy="228240"/>
+            <a:ext cx="2094840" cy="227880"/>
           </a:xfrm>
           <a:prstGeom prst="rect">
             <a:avLst/>
@@ -19860,7 +19921,7 @@
         <p:spPr>
           <a:xfrm>
             <a:off x="2857680" y="6105600"/>
-            <a:ext cx="8000640" cy="228240"/>
+            <a:ext cx="8000280" cy="227880"/>
           </a:xfrm>
           <a:prstGeom prst="rect">
             <a:avLst/>
@@ -19951,7 +20012,7 @@
         <p:spPr>
           <a:xfrm>
             <a:off x="457200" y="292680"/>
-            <a:ext cx="8762760" cy="639720"/>
+            <a:ext cx="8762400" cy="639360"/>
           </a:xfrm>
           <a:prstGeom prst="rect">
             <a:avLst/>
@@ -20005,7 +20066,7 @@
         <p:spPr>
           <a:xfrm>
             <a:off x="476280" y="1276200"/>
-            <a:ext cx="4762080" cy="4762080"/>
+            <a:ext cx="4761720" cy="4761720"/>
           </a:xfrm>
           <a:prstGeom prst="roundRect">
             <a:avLst>
@@ -20032,6 +20093,11 @@
             <a:noAutofit/>
           </a:bodyPr>
           <a:p>
+            <a:pPr>
+              <a:lnSpc>
+                <a:spcPct val="100000"/>
+              </a:lnSpc>
+            </a:pPr>
             <a:endParaRPr b="0" lang="en-US" sz="1800" spc="-1" strike="noStrike">
               <a:solidFill>
                 <a:srgbClr val="000000"/>
@@ -20050,7 +20116,7 @@
         <p:spPr>
           <a:xfrm>
             <a:off x="5715000" y="1371600"/>
-            <a:ext cx="5571720" cy="1104480"/>
+            <a:ext cx="5571360" cy="1104120"/>
           </a:xfrm>
           <a:prstGeom prst="roundRect">
             <a:avLst>
@@ -20078,6 +20144,11 @@
             <a:noAutofit/>
           </a:bodyPr>
           <a:p>
+            <a:pPr>
+              <a:lnSpc>
+                <a:spcPct val="100000"/>
+              </a:lnSpc>
+            </a:pPr>
             <a:endParaRPr b="0" lang="en-US" sz="1800" spc="-1" strike="noStrike">
               <a:solidFill>
                 <a:srgbClr val="000000"/>
@@ -20096,7 +20167,7 @@
         <p:spPr>
           <a:xfrm>
             <a:off x="6019920" y="1571760"/>
-            <a:ext cx="4762080" cy="333000"/>
+            <a:ext cx="4761720" cy="332640"/>
           </a:xfrm>
           <a:prstGeom prst="rect">
             <a:avLst/>
@@ -20150,7 +20221,7 @@
         <p:spPr>
           <a:xfrm>
             <a:off x="6019920" y="2000160"/>
-            <a:ext cx="4762080" cy="333000"/>
+            <a:ext cx="4761720" cy="332640"/>
           </a:xfrm>
           <a:prstGeom prst="rect">
             <a:avLst/>
@@ -20204,7 +20275,7 @@
         <p:spPr>
           <a:xfrm>
             <a:off x="5715000" y="2724120"/>
-            <a:ext cx="5571720" cy="1980720"/>
+            <a:ext cx="5571360" cy="1980360"/>
           </a:xfrm>
           <a:prstGeom prst="roundRect">
             <a:avLst>
@@ -20232,6 +20303,11 @@
             <a:noAutofit/>
           </a:bodyPr>
           <a:p>
+            <a:pPr>
+              <a:lnSpc>
+                <a:spcPct val="100000"/>
+              </a:lnSpc>
+            </a:pPr>
             <a:endParaRPr b="0" lang="en-US" sz="1800" spc="-1" strike="noStrike">
               <a:solidFill>
                 <a:srgbClr val="000000"/>
@@ -20250,7 +20326,7 @@
         <p:spPr>
           <a:xfrm>
             <a:off x="5981760" y="2933640"/>
-            <a:ext cx="4762080" cy="285480"/>
+            <a:ext cx="4761720" cy="285120"/>
           </a:xfrm>
           <a:prstGeom prst="rect">
             <a:avLst/>
@@ -20304,7 +20380,7 @@
         <p:spPr>
           <a:xfrm>
             <a:off x="5981760" y="3352680"/>
-            <a:ext cx="4971600" cy="1104480"/>
+            <a:ext cx="4971240" cy="1104120"/>
           </a:xfrm>
           <a:prstGeom prst="rect">
             <a:avLst/>
@@ -20358,7 +20434,7 @@
         <p:spPr>
           <a:xfrm>
             <a:off x="5715000" y="4952880"/>
-            <a:ext cx="5571720" cy="914040"/>
+            <a:ext cx="5571360" cy="913680"/>
           </a:xfrm>
           <a:prstGeom prst="roundRect">
             <a:avLst>
@@ -20386,6 +20462,11 @@
             <a:noAutofit/>
           </a:bodyPr>
           <a:p>
+            <a:pPr>
+              <a:lnSpc>
+                <a:spcPct val="100000"/>
+              </a:lnSpc>
+            </a:pPr>
             <a:endParaRPr b="0" lang="en-US" sz="1800" spc="-1" strike="noStrike">
               <a:solidFill>
                 <a:srgbClr val="000000"/>
@@ -20404,7 +20485,7 @@
         <p:spPr>
           <a:xfrm>
             <a:off x="5981760" y="5105520"/>
-            <a:ext cx="4762080" cy="266400"/>
+            <a:ext cx="4761720" cy="266040"/>
           </a:xfrm>
           <a:prstGeom prst="rect">
             <a:avLst/>
@@ -20458,7 +20539,7 @@
         <p:spPr>
           <a:xfrm>
             <a:off x="5981760" y="5448240"/>
-            <a:ext cx="5000400" cy="266400"/>
+            <a:ext cx="5000040" cy="266040"/>
           </a:xfrm>
           <a:prstGeom prst="rect">
             <a:avLst/>
@@ -20549,7 +20630,7 @@
         <p:spPr>
           <a:xfrm>
             <a:off x="457200" y="292680"/>
-            <a:ext cx="7772040" cy="639720"/>
+            <a:ext cx="7771680" cy="639360"/>
           </a:xfrm>
           <a:prstGeom prst="rect">
             <a:avLst/>
@@ -20606,7 +20687,7 @@
         <p:spPr>
           <a:xfrm>
             <a:off x="8942760" y="292680"/>
-            <a:ext cx="310680" cy="310680"/>
+            <a:ext cx="310320" cy="310320"/>
           </a:xfrm>
           <a:prstGeom prst="ellipse">
             <a:avLst/>
@@ -20629,6 +20710,11 @@
             <a:noAutofit/>
           </a:bodyPr>
           <a:p>
+            <a:pPr>
+              <a:lnSpc>
+                <a:spcPct val="100000"/>
+              </a:lnSpc>
+            </a:pPr>
             <a:endParaRPr b="0" lang="en-US" sz="1800" spc="-1" strike="noStrike">
               <a:solidFill>
                 <a:srgbClr val="ffffff"/>
@@ -20647,7 +20733,7 @@
         <p:spPr>
           <a:xfrm>
             <a:off x="8942760" y="292680"/>
-            <a:ext cx="310680" cy="310680"/>
+            <a:ext cx="310320" cy="310320"/>
           </a:xfrm>
           <a:prstGeom prst="rect">
             <a:avLst/>
@@ -20704,7 +20790,7 @@
         <p:spPr>
           <a:xfrm>
             <a:off x="9345240" y="292680"/>
-            <a:ext cx="2742840" cy="310680"/>
+            <a:ext cx="2742480" cy="310320"/>
           </a:xfrm>
           <a:prstGeom prst="rect">
             <a:avLst/>
@@ -20771,7 +20857,7 @@
         <p:spPr>
           <a:xfrm>
             <a:off x="457200" y="1371600"/>
-            <a:ext cx="6400440" cy="1416960"/>
+            <a:ext cx="6400080" cy="1416600"/>
           </a:xfrm>
           <a:prstGeom prst="roundRect">
             <a:avLst>
@@ -20796,6 +20882,11 @@
             <a:noAutofit/>
           </a:bodyPr>
           <a:p>
+            <a:pPr>
+              <a:lnSpc>
+                <a:spcPct val="100000"/>
+              </a:lnSpc>
+            </a:pPr>
             <a:endParaRPr b="0" lang="en-US" sz="1800" spc="-1" strike="noStrike">
               <a:solidFill>
                 <a:srgbClr val="000000"/>
@@ -20814,7 +20905,7 @@
         <p:spPr>
           <a:xfrm>
             <a:off x="713160" y="1517760"/>
-            <a:ext cx="5888520" cy="1124280"/>
+            <a:ext cx="5888160" cy="1123920"/>
           </a:xfrm>
           <a:prstGeom prst="rect">
             <a:avLst/>
@@ -20897,7 +20988,7 @@
         <p:spPr>
           <a:xfrm>
             <a:off x="457200" y="3063240"/>
-            <a:ext cx="6400440" cy="3062880"/>
+            <a:ext cx="6400080" cy="3062520"/>
           </a:xfrm>
           <a:prstGeom prst="roundRect">
             <a:avLst>
@@ -20922,6 +21013,11 @@
             <a:noAutofit/>
           </a:bodyPr>
           <a:p>
+            <a:pPr>
+              <a:lnSpc>
+                <a:spcPct val="100000"/>
+              </a:lnSpc>
+            </a:pPr>
             <a:endParaRPr b="0" lang="en-US" sz="1800" spc="-1" strike="noStrike">
               <a:solidFill>
                 <a:srgbClr val="000000"/>
@@ -20940,7 +21036,7 @@
         <p:spPr>
           <a:xfrm>
             <a:off x="658440" y="3209400"/>
-            <a:ext cx="5997960" cy="365400"/>
+            <a:ext cx="5997600" cy="365040"/>
           </a:xfrm>
           <a:prstGeom prst="rect">
             <a:avLst/>
@@ -20997,7 +21093,7 @@
         <p:spPr>
           <a:xfrm>
             <a:off x="658440" y="3593520"/>
-            <a:ext cx="5997960" cy="2386080"/>
+            <a:ext cx="5997600" cy="2385720"/>
           </a:xfrm>
           <a:prstGeom prst="rect">
             <a:avLst/>
@@ -21121,7 +21217,7 @@
         <p:spPr>
           <a:xfrm>
             <a:off x="8366760" y="2834640"/>
-            <a:ext cx="639720" cy="1005480"/>
+            <a:ext cx="639360" cy="1005120"/>
           </a:xfrm>
           <a:prstGeom prst="triangle">
             <a:avLst>
@@ -21146,6 +21242,11 @@
             <a:noAutofit/>
           </a:bodyPr>
           <a:p>
+            <a:pPr>
+              <a:lnSpc>
+                <a:spcPct val="100000"/>
+              </a:lnSpc>
+            </a:pPr>
             <a:endParaRPr b="0" lang="en-US" sz="1800" spc="-1" strike="noStrike">
               <a:solidFill>
                 <a:srgbClr val="ffffff"/>
@@ -21164,7 +21265,7 @@
         <p:spPr>
           <a:xfrm>
             <a:off x="8458200" y="3749040"/>
-            <a:ext cx="456840" cy="639720"/>
+            <a:ext cx="456480" cy="639360"/>
           </a:xfrm>
           <a:prstGeom prst="rect">
             <a:avLst/>
@@ -21187,6 +21288,11 @@
             <a:noAutofit/>
           </a:bodyPr>
           <a:p>
+            <a:pPr>
+              <a:lnSpc>
+                <a:spcPct val="100000"/>
+              </a:lnSpc>
+            </a:pPr>
             <a:endParaRPr b="0" lang="en-US" sz="1800" spc="-1" strike="noStrike">
               <a:solidFill>
                 <a:srgbClr val="ffffff"/>
@@ -21247,7 +21353,7 @@
         <p:spPr>
           <a:xfrm>
             <a:off x="8915400" y="1965960"/>
-            <a:ext cx="822600" cy="319680"/>
+            <a:ext cx="822240" cy="319320"/>
           </a:xfrm>
           <a:prstGeom prst="rect">
             <a:avLst/>
@@ -21346,7 +21452,7 @@
         <p:spPr>
           <a:xfrm>
             <a:off x="8915400" y="4754880"/>
-            <a:ext cx="822600" cy="319680"/>
+            <a:ext cx="822240" cy="319320"/>
           </a:xfrm>
           <a:prstGeom prst="rect">
             <a:avLst/>
@@ -21403,7 +21509,7 @@
         <p:spPr>
           <a:xfrm>
             <a:off x="7543800" y="3474720"/>
-            <a:ext cx="731160" cy="319680"/>
+            <a:ext cx="730800" cy="319320"/>
           </a:xfrm>
           <a:prstGeom prst="rect">
             <a:avLst/>
@@ -21460,7 +21566,7 @@
         <p:spPr>
           <a:xfrm>
             <a:off x="11457360" y="6400800"/>
-            <a:ext cx="456840" cy="273960"/>
+            <a:ext cx="456480" cy="273600"/>
           </a:xfrm>
           <a:prstGeom prst="rect">
             <a:avLst/>
@@ -21518,8 +21624,8 @@
         </p:nvCxnSpPr>
         <p:spPr>
           <a:xfrm flipV="1">
-            <a:off x="8686800" y="1517760"/>
-            <a:ext cx="360" cy="1317240"/>
+            <a:off x="8686440" y="1517760"/>
+            <a:ext cx="1080" cy="1317240"/>
           </a:xfrm>
           <a:prstGeom prst="straightConnector1">
             <a:avLst/>
@@ -21546,7 +21652,7 @@
         <p:spPr>
           <a:xfrm>
             <a:off x="9272880" y="2612520"/>
-            <a:ext cx="2260080" cy="2043720"/>
+            <a:ext cx="2259720" cy="2043360"/>
           </a:xfrm>
           <a:prstGeom prst="rect">
             <a:avLst/>
